--- a/research/honduras/slides/Honduras_price_finance_varieties.pptx
+++ b/research/honduras/slides/Honduras_price_finance_varieties.pptx
@@ -9293,7 +9293,7 @@
         <p:spPr>
           <a:xfrm>
             <a:off x="8001000" y="2167128"/>
-            <a:ext cx="685800" cy="457200"/>
+            <a:ext cx="685800" cy="365760"/>
           </a:xfrm>
           <a:prstGeom prst="rect">
             <a:avLst/>
@@ -9342,7 +9342,7 @@
         <p:spPr>
           <a:xfrm>
             <a:off x="8686800" y="2167128"/>
-            <a:ext cx="2103120" cy="457200"/>
+            <a:ext cx="2103120" cy="365760"/>
           </a:xfrm>
           <a:prstGeom prst="rect">
             <a:avLst/>
@@ -9391,7 +9391,7 @@
         <p:spPr>
           <a:xfrm>
             <a:off x="10789920" y="2167128"/>
-            <a:ext cx="1188720" cy="457200"/>
+            <a:ext cx="1188720" cy="365760"/>
           </a:xfrm>
           <a:prstGeom prst="rect">
             <a:avLst/>
@@ -9439,8 +9439,8 @@
         </p:nvSpPr>
         <p:spPr>
           <a:xfrm>
-            <a:off x="8001000" y="2624328"/>
-            <a:ext cx="685800" cy="457200"/>
+            <a:off x="8001000" y="2532888"/>
+            <a:ext cx="685800" cy="365760"/>
           </a:xfrm>
           <a:prstGeom prst="rect">
             <a:avLst/>
@@ -9488,8 +9488,8 @@
         </p:nvSpPr>
         <p:spPr>
           <a:xfrm>
-            <a:off x="8686800" y="2624328"/>
-            <a:ext cx="2103120" cy="457200"/>
+            <a:off x="8686800" y="2532888"/>
+            <a:ext cx="2103120" cy="365760"/>
           </a:xfrm>
           <a:prstGeom prst="rect">
             <a:avLst/>
@@ -9537,8 +9537,8 @@
         </p:nvSpPr>
         <p:spPr>
           <a:xfrm>
-            <a:off x="10789920" y="2624328"/>
-            <a:ext cx="1188720" cy="457200"/>
+            <a:off x="10789920" y="2532888"/>
+            <a:ext cx="1188720" cy="365760"/>
           </a:xfrm>
           <a:prstGeom prst="rect">
             <a:avLst/>
@@ -9586,8 +9586,8 @@
         </p:nvSpPr>
         <p:spPr>
           <a:xfrm>
-            <a:off x="8001000" y="3081528"/>
-            <a:ext cx="685800" cy="457200"/>
+            <a:off x="8001000" y="2898648"/>
+            <a:ext cx="685800" cy="365760"/>
           </a:xfrm>
           <a:prstGeom prst="rect">
             <a:avLst/>
@@ -9635,8 +9635,8 @@
         </p:nvSpPr>
         <p:spPr>
           <a:xfrm>
-            <a:off x="8686800" y="3081528"/>
-            <a:ext cx="2103120" cy="457200"/>
+            <a:off x="8686800" y="2898648"/>
+            <a:ext cx="2103120" cy="365760"/>
           </a:xfrm>
           <a:prstGeom prst="rect">
             <a:avLst/>
@@ -9684,8 +9684,8 @@
         </p:nvSpPr>
         <p:spPr>
           <a:xfrm>
-            <a:off x="10789920" y="3081528"/>
-            <a:ext cx="1188720" cy="457200"/>
+            <a:off x="10789920" y="2898648"/>
+            <a:ext cx="1188720" cy="365760"/>
           </a:xfrm>
           <a:prstGeom prst="rect">
             <a:avLst/>
@@ -9733,8 +9733,8 @@
         </p:nvSpPr>
         <p:spPr>
           <a:xfrm>
-            <a:off x="8001000" y="3538728"/>
-            <a:ext cx="685800" cy="457200"/>
+            <a:off x="8001000" y="3264408"/>
+            <a:ext cx="685800" cy="365760"/>
           </a:xfrm>
           <a:prstGeom prst="rect">
             <a:avLst/>
@@ -9782,8 +9782,8 @@
         </p:nvSpPr>
         <p:spPr>
           <a:xfrm>
-            <a:off x="8686800" y="3538728"/>
-            <a:ext cx="2103120" cy="457200"/>
+            <a:off x="8686800" y="3264408"/>
+            <a:ext cx="2103120" cy="365760"/>
           </a:xfrm>
           <a:prstGeom prst="rect">
             <a:avLst/>
@@ -9831,8 +9831,8 @@
         </p:nvSpPr>
         <p:spPr>
           <a:xfrm>
-            <a:off x="10789920" y="3538728"/>
-            <a:ext cx="1188720" cy="457200"/>
+            <a:off x="10789920" y="3264408"/>
+            <a:ext cx="1188720" cy="365760"/>
           </a:xfrm>
           <a:prstGeom prst="rect">
             <a:avLst/>
@@ -9880,8 +9880,302 @@
         </p:nvSpPr>
         <p:spPr>
           <a:xfrm>
+            <a:off x="8001000" y="3630168"/>
+            <a:ext cx="685800" cy="365760"/>
+          </a:xfrm>
+          <a:prstGeom prst="rect">
+            <a:avLst/>
+          </a:prstGeom>
+          <a:solidFill>
+            <a:srgbClr val="FFFFFF"/>
+          </a:solidFill>
+          <a:ln>
+            <a:noFill/>
+          </a:ln>
+        </p:spPr>
+        <p:txBody>
+          <a:bodyPr wrap="square" lIns="36576" tIns="27432" rIns="36576" bIns="27432" anchor="ctr" rtlCol="0">
+            <a:noAutofit/>
+          </a:bodyPr>
+          <a:lstStyle/>
+          <a:p>
+            <a:pPr algn="l" marL="0" indent="0">
+              <a:spcBef>
+                <a:spcPts val="0"/>
+              </a:spcBef>
+              <a:spcAft>
+                <a:spcPts val="0"/>
+              </a:spcAft>
+              <a:buNone/>
+            </a:pPr>
+            <a:r>
+              <a:rPr lang="en-GB" sz="750" dirty="0">
+                <a:solidFill>
+                  <a:srgbClr val="262626"/>
+                </a:solidFill>
+                <a:latin typeface="Arial"/>
+                <a:cs typeface="Arial"/>
+              </a:rPr>
+              <a:t>Aug 2017</a:t>
+            </a:r>
+          </a:p>
+        </p:txBody>
+      </p:sp>
+      <p:sp>
+        <p:nvSpPr>
+          <p:cNvPr id="69" name="TextBox 69"/>
+          <p:cNvSpPr txBox="1"/>
+          <p:nvPr/>
+        </p:nvSpPr>
+        <p:spPr>
+          <a:xfrm>
+            <a:off x="8686800" y="3630168"/>
+            <a:ext cx="2103120" cy="365760"/>
+          </a:xfrm>
+          <a:prstGeom prst="rect">
+            <a:avLst/>
+          </a:prstGeom>
+          <a:solidFill>
+            <a:srgbClr val="FFFFFF"/>
+          </a:solidFill>
+          <a:ln>
+            <a:noFill/>
+          </a:ln>
+        </p:spPr>
+        <p:txBody>
+          <a:bodyPr wrap="square" lIns="36576" tIns="27432" rIns="36576" bIns="27432" anchor="ctr" rtlCol="0">
+            <a:noAutofit/>
+          </a:bodyPr>
+          <a:lstStyle/>
+          <a:p>
+            <a:pPr algn="ctr" marL="0" indent="0">
+              <a:spcBef>
+                <a:spcPts val="0"/>
+              </a:spcBef>
+              <a:spcAft>
+                <a:spcPts val="0"/>
+              </a:spcAft>
+              <a:buNone/>
+            </a:pPr>
+            <a:r>
+              <a:rPr lang="en-GB" sz="750" dirty="0">
+                <a:solidFill>
+                  <a:srgbClr val="262626"/>
+                </a:solidFill>
+                <a:latin typeface="Arial"/>
+                <a:cs typeface="Arial"/>
+              </a:rPr>
+              <a:t>60 % of the park; seed: 65 % Lempira</a:t>
+            </a:r>
+          </a:p>
+        </p:txBody>
+      </p:sp>
+      <p:sp>
+        <p:nvSpPr>
+          <p:cNvPr id="70" name="TextBox 70"/>
+          <p:cNvSpPr txBox="1"/>
+          <p:nvPr/>
+        </p:nvSpPr>
+        <p:spPr>
+          <a:xfrm>
+            <a:off x="10789920" y="3630168"/>
+            <a:ext cx="1188720" cy="365760"/>
+          </a:xfrm>
+          <a:prstGeom prst="rect">
+            <a:avLst/>
+          </a:prstGeom>
+          <a:solidFill>
+            <a:srgbClr val="FFFFFF"/>
+          </a:solidFill>
+          <a:ln>
+            <a:noFill/>
+          </a:ln>
+        </p:spPr>
+        <p:txBody>
+          <a:bodyPr wrap="square" lIns="36576" tIns="27432" rIns="36576" bIns="27432" anchor="ctr" rtlCol="0">
+            <a:noAutofit/>
+          </a:bodyPr>
+          <a:lstStyle/>
+          <a:p>
+            <a:pPr algn="ctr" marL="0" indent="0">
+              <a:spcBef>
+                <a:spcPts val="0"/>
+              </a:spcBef>
+              <a:spcAft>
+                <a:spcPts val="0"/>
+              </a:spcAft>
+              <a:buNone/>
+            </a:pPr>
+            <a:r>
+              <a:rPr lang="en-GB" sz="750" dirty="0">
+                <a:solidFill>
+                  <a:srgbClr val="262626"/>
+                </a:solidFill>
+                <a:latin typeface="Arial"/>
+                <a:cs typeface="Arial"/>
+              </a:rPr>
+              <a:t>⚠ La Prensa, 25 Aug 2017</a:t>
+            </a:r>
+          </a:p>
+        </p:txBody>
+      </p:sp>
+      <p:sp>
+        <p:nvSpPr>
+          <p:cNvPr id="71" name="TextBox 71"/>
+          <p:cNvSpPr txBox="1"/>
+          <p:nvPr/>
+        </p:nvSpPr>
+        <p:spPr>
+          <a:xfrm>
             <a:off x="8001000" y="3995928"/>
-            <a:ext cx="685800" cy="457200"/>
+            <a:ext cx="685800" cy="365760"/>
+          </a:xfrm>
+          <a:prstGeom prst="rect">
+            <a:avLst/>
+          </a:prstGeom>
+          <a:solidFill>
+            <a:srgbClr val="F2F5F8"/>
+          </a:solidFill>
+          <a:ln>
+            <a:noFill/>
+          </a:ln>
+        </p:spPr>
+        <p:txBody>
+          <a:bodyPr wrap="square" lIns="36576" tIns="27432" rIns="36576" bIns="27432" anchor="ctr" rtlCol="0">
+            <a:noAutofit/>
+          </a:bodyPr>
+          <a:lstStyle/>
+          <a:p>
+            <a:pPr algn="l" marL="0" indent="0">
+              <a:spcBef>
+                <a:spcPts val="0"/>
+              </a:spcBef>
+              <a:spcAft>
+                <a:spcPts val="0"/>
+              </a:spcAft>
+              <a:buNone/>
+            </a:pPr>
+            <a:r>
+              <a:rPr lang="en-GB" sz="750" dirty="0">
+                <a:solidFill>
+                  <a:srgbClr val="262626"/>
+                </a:solidFill>
+                <a:latin typeface="Arial"/>
+                <a:cs typeface="Arial"/>
+              </a:rPr>
+              <a:t>Oct 2017</a:t>
+            </a:r>
+          </a:p>
+        </p:txBody>
+      </p:sp>
+      <p:sp>
+        <p:nvSpPr>
+          <p:cNvPr id="72" name="TextBox 72"/>
+          <p:cNvSpPr txBox="1"/>
+          <p:nvPr/>
+        </p:nvSpPr>
+        <p:spPr>
+          <a:xfrm>
+            <a:off x="8686800" y="3995928"/>
+            <a:ext cx="2103120" cy="365760"/>
+          </a:xfrm>
+          <a:prstGeom prst="rect">
+            <a:avLst/>
+          </a:prstGeom>
+          <a:solidFill>
+            <a:srgbClr val="F2F5F8"/>
+          </a:solidFill>
+          <a:ln>
+            <a:noFill/>
+          </a:ln>
+        </p:spPr>
+        <p:txBody>
+          <a:bodyPr wrap="square" lIns="36576" tIns="27432" rIns="36576" bIns="27432" anchor="ctr" rtlCol="0">
+            <a:noAutofit/>
+          </a:bodyPr>
+          <a:lstStyle/>
+          <a:p>
+            <a:pPr algn="ctr" marL="0" indent="0">
+              <a:spcBef>
+                <a:spcPts val="0"/>
+              </a:spcBef>
+              <a:spcAft>
+                <a:spcPts val="0"/>
+              </a:spcAft>
+              <a:buNone/>
+            </a:pPr>
+            <a:r>
+              <a:rPr lang="en-GB" sz="750" dirty="0">
+                <a:solidFill>
+                  <a:srgbClr val="262626"/>
+                </a:solidFill>
+                <a:latin typeface="Arial"/>
+                <a:cs typeface="Arial"/>
+              </a:rPr>
+              <a:t>Lempira alone = 56,08 % of sampled farms</a:t>
+            </a:r>
+          </a:p>
+        </p:txBody>
+      </p:sp>
+      <p:sp>
+        <p:nvSpPr>
+          <p:cNvPr id="73" name="TextBox 73"/>
+          <p:cNvSpPr txBox="1"/>
+          <p:nvPr/>
+        </p:nvSpPr>
+        <p:spPr>
+          <a:xfrm>
+            <a:off x="10789920" y="3995928"/>
+            <a:ext cx="1188720" cy="365760"/>
+          </a:xfrm>
+          <a:prstGeom prst="rect">
+            <a:avLst/>
+          </a:prstGeom>
+          <a:solidFill>
+            <a:srgbClr val="F2F5F8"/>
+          </a:solidFill>
+          <a:ln>
+            <a:noFill/>
+          </a:ln>
+        </p:spPr>
+        <p:txBody>
+          <a:bodyPr wrap="square" lIns="36576" tIns="27432" rIns="36576" bIns="27432" anchor="ctr" rtlCol="0">
+            <a:noAutofit/>
+          </a:bodyPr>
+          <a:lstStyle/>
+          <a:p>
+            <a:pPr algn="ctr" marL="0" indent="0">
+              <a:spcBef>
+                <a:spcPts val="0"/>
+              </a:spcBef>
+              <a:spcAft>
+                <a:spcPts val="0"/>
+              </a:spcAft>
+              <a:buNone/>
+            </a:pPr>
+            <a:r>
+              <a:rPr lang="en-GB" sz="750" dirty="0">
+                <a:solidFill>
+                  <a:srgbClr val="262626"/>
+                </a:solidFill>
+                <a:latin typeface="Arial"/>
+                <a:cs typeface="Arial"/>
+              </a:rPr>
+              <a:t>⚠ IHCAFE SAT bulletin No 8</a:t>
+            </a:r>
+          </a:p>
+        </p:txBody>
+      </p:sp>
+      <p:sp>
+        <p:nvSpPr>
+          <p:cNvPr id="74" name="TextBox 74"/>
+          <p:cNvSpPr txBox="1"/>
+          <p:nvPr/>
+        </p:nvSpPr>
+        <p:spPr>
+          <a:xfrm>
+            <a:off x="8001000" y="4361688"/>
+            <a:ext cx="685800" cy="365760"/>
           </a:xfrm>
           <a:prstGeom prst="rect">
             <a:avLst/>
@@ -9916,21 +10210,21 @@
                 <a:latin typeface="Arial"/>
                 <a:cs typeface="Arial"/>
               </a:rPr>
-              <a:t>Oct 2017</a:t>
-            </a:r>
-          </a:p>
-        </p:txBody>
-      </p:sp>
-      <p:sp>
-        <p:nvSpPr>
-          <p:cNvPr id="69" name="TextBox 69"/>
-          <p:cNvSpPr txBox="1"/>
-          <p:nvPr/>
-        </p:nvSpPr>
-        <p:spPr>
-          <a:xfrm>
-            <a:off x="8686800" y="3995928"/>
-            <a:ext cx="2103120" cy="457200"/>
+              <a:t>~2020</a:t>
+            </a:r>
+          </a:p>
+        </p:txBody>
+      </p:sp>
+      <p:sp>
+        <p:nvSpPr>
+          <p:cNvPr id="75" name="TextBox 75"/>
+          <p:cNvSpPr txBox="1"/>
+          <p:nvPr/>
+        </p:nvSpPr>
+        <p:spPr>
+          <a:xfrm>
+            <a:off x="8686800" y="4361688"/>
+            <a:ext cx="2103120" cy="365760"/>
           </a:xfrm>
           <a:prstGeom prst="rect">
             <a:avLst/>
@@ -9965,21 +10259,21 @@
                 <a:latin typeface="Arial"/>
                 <a:cs typeface="Arial"/>
               </a:rPr>
-              <a:t>Lempira alone = 56,08 % of sampled farms</a:t>
-            </a:r>
-          </a:p>
-        </p:txBody>
-      </p:sp>
-      <p:sp>
-        <p:nvSpPr>
-          <p:cNvPr id="70" name="TextBox 70"/>
-          <p:cNvSpPr txBox="1"/>
-          <p:nvPr/>
-        </p:nvSpPr>
-        <p:spPr>
-          <a:xfrm>
-            <a:off x="10789920" y="3995928"/>
-            <a:ext cx="1188720" cy="457200"/>
+              <a:t>60 % of cultivation</a:t>
+            </a:r>
+          </a:p>
+        </p:txBody>
+      </p:sp>
+      <p:sp>
+        <p:nvSpPr>
+          <p:cNvPr id="76" name="TextBox 76"/>
+          <p:cNvSpPr txBox="1"/>
+          <p:nvPr/>
+        </p:nvSpPr>
+        <p:spPr>
+          <a:xfrm>
+            <a:off x="10789920" y="4361688"/>
+            <a:ext cx="1188720" cy="365760"/>
           </a:xfrm>
           <a:prstGeom prst="rect">
             <a:avLst/>
@@ -10014,20 +10308,20 @@
                 <a:latin typeface="Arial"/>
                 <a:cs typeface="Arial"/>
               </a:rPr>
-              <a:t>⚠ IHCAFE SAT bulletin No 8</a:t>
-            </a:r>
-          </a:p>
-        </p:txBody>
-      </p:sp>
-      <p:sp>
-        <p:nvSpPr>
-          <p:cNvPr id="71" name="TextBox 71"/>
-          <p:cNvSpPr txBox="1"/>
-          <p:nvPr/>
-        </p:nvSpPr>
-        <p:spPr>
-          <a:xfrm>
-            <a:off x="8001000" y="4526280"/>
+              <a:t>⚠ Perfect Daily Grind, Mar 2020</a:t>
+            </a:r>
+          </a:p>
+        </p:txBody>
+      </p:sp>
+      <p:sp>
+        <p:nvSpPr>
+          <p:cNvPr id="77" name="TextBox 77"/>
+          <p:cNvSpPr txBox="1"/>
+          <p:nvPr/>
+        </p:nvSpPr>
+        <p:spPr>
+          <a:xfrm>
+            <a:off x="8001000" y="4800600"/>
             <a:ext cx="3977640" cy="1097280"/>
           </a:xfrm>
           <a:prstGeom prst="rect">
@@ -10148,11 +10442,32 @@
               <a:t>Still called resistant by IHCAFE in 2020: Parainema only</a:t>
             </a:r>
           </a:p>
-        </p:txBody>
-      </p:sp>
-      <p:sp>
-        <p:nvSpPr>
-          <p:cNvPr id="72" name="TextBox 72"/>
+          <a:p>
+            <a:pPr algn="l" marL="0" indent="0">
+              <a:spcBef>
+                <a:spcPts val="0"/>
+              </a:spcBef>
+              <a:spcAft>
+                <a:spcPts val="0"/>
+              </a:spcAft>
+              <a:buNone/>
+            </a:pPr>
+            <a:r>
+              <a:rPr lang="en-GB" sz="800" b="1" dirty="0">
+                <a:solidFill>
+                  <a:srgbClr val="C00000"/>
+                </a:solidFill>
+                <a:latin typeface="Arial"/>
+                <a:cs typeface="Arial"/>
+              </a:rPr>
+              <a:t>After Lempira broke: ≈ 3–4 % of the park still resistant ⚠</a:t>
+            </a:r>
+          </a:p>
+        </p:txBody>
+      </p:sp>
+      <p:sp>
+        <p:nvSpPr>
+          <p:cNvPr id="78" name="TextBox 78"/>
           <p:cNvSpPr txBox="1"/>
           <p:nvPr/>
         </p:nvSpPr>

--- a/research/honduras/slides/Honduras_price_finance_varieties.pptx
+++ b/research/honduras/slides/Honduras_price_finance_varieties.pptx
@@ -7174,7 +7174,7 @@
                 <a:latin typeface="Arial"/>
                 <a:cs typeface="Arial"/>
               </a:rPr>
-              <a:t>Only 3 rust-resistant varieties from 1990 to 2004, then none until 2024; Lempira broke in 2017</a:t>
+              <a:t>IHCAFE bred 3 rust-resistant varieties (1990–2004), none new until 2024; Lempira failed by 2017</a:t>
             </a:r>
           </a:p>
         </p:txBody>
@@ -7225,7 +7225,7 @@
                 <a:latin typeface="Arial"/>
                 <a:cs typeface="Arial"/>
               </a:rPr>
-              <a:t>IHCAFE 90 (1990s), Lempira (1997–98), Parainema (2004), all with Timor Hybrid resistance; next: 3 varieties in Feb 2024 (Ihcatú 75, Anacafé 14, Obatá), 4 announced</a:t>
+              <a:t>IHCAFE 90 (1990s), Lempira (1997–98 ⚠), Parainema (2004 ⚠), all with Timor Hybrid resistance. Feb 2024: Ihcatú 75, Anacafé 14, Obatá, bred abroad, released by IHCAFE ⚠</a:t>
             </a:r>
           </a:p>
           <a:p>
@@ -7250,7 +7250,7 @@
                 <a:latin typeface="Arial"/>
                 <a:cs typeface="Arial"/>
               </a:rPr>
-              <a:t>Use: 50 % of the area resistant in 2013, 60 % of producers and 62 % of farms in 2014. Then Lempira broke (April 2017); 4 new rust strains in 2018, 16 in 2019</a:t>
+              <a:t>Planted: 50 % of the AREA resistant in 2013, 60 % of PRODUCERS in 2014 (two measures, not a trend). Lempira weakened from 2015 ⚠, loss confirmed April 2017</a:t>
             </a:r>
           </a:p>
           <a:p>
@@ -7275,7 +7275,7 @@
                 <a:latin typeface="Arial"/>
                 <a:cs typeface="Arial"/>
               </a:rPr>
-              <a:t>Productivity: no official yield by variety found. PAPP replanting aimed at 5 → 45 qq/manzana; USDA 2025–26 credits Parainema for the area growth</a:t>
+              <a:t>After Lempira: ≈ 17 % of monitored farms kept a resistant variety (IHCAFE, Oct 2017 ⚠). Parainema last called resistant in May 2021 (USDA). No yield by variety found</a:t>
             </a:r>
           </a:p>
         </p:txBody>
@@ -7978,7 +7978,7 @@
         <p:spPr>
           <a:xfrm>
             <a:off x="2521634" y="2350008"/>
-            <a:ext cx="4079631" cy="182880"/>
+            <a:ext cx="3840480" cy="182880"/>
           </a:xfrm>
           <a:prstGeom prst="rect">
             <a:avLst/>
@@ -7999,14 +7999,14 @@
         </p:nvSpPr>
         <p:spPr>
           <a:xfrm>
-            <a:off x="6601265" y="2350008"/>
-            <a:ext cx="1083212" cy="182880"/>
-          </a:xfrm>
-          <a:prstGeom prst="rect">
-            <a:avLst/>
-          </a:prstGeom>
-          <a:solidFill>
-            <a:srgbClr val="BFBFBF"/>
+            <a:off x="6362114" y="2350008"/>
+            <a:ext cx="1322363" cy="182880"/>
+          </a:xfrm>
+          <a:prstGeom prst="rect">
+            <a:avLst/>
+          </a:prstGeom>
+          <a:solidFill>
+            <a:srgbClr val="ED7D31"/>
           </a:solidFill>
           <a:ln>
             <a:noFill/>
@@ -8069,7 +8069,7 @@
         <p:spPr>
           <a:xfrm>
             <a:off x="2521634" y="2139696"/>
-            <a:ext cx="2926080" cy="182880"/>
+            <a:ext cx="3108960" cy="182880"/>
           </a:xfrm>
           <a:prstGeom prst="rect">
             <a:avLst/>
@@ -8102,7 +8102,7 @@
                 <a:latin typeface="Arial"/>
                 <a:cs typeface="Arial"/>
               </a:rPr>
-              <a:t>resistant in 2018; not listed as resistant in 2020</a:t>
+              <a:t>resistant per IHCAFE in 2018; ~80 % vs the new strain (2017 ⚠)</a:t>
             </a:r>
           </a:p>
         </p:txBody>
@@ -8184,7 +8184,7 @@
         <p:spPr>
           <a:xfrm>
             <a:off x="3647049" y="2990088"/>
-            <a:ext cx="2715065" cy="182880"/>
+            <a:ext cx="2391508" cy="182880"/>
           </a:xfrm>
           <a:prstGeom prst="rect">
             <a:avLst/>
@@ -8205,6 +8205,28 @@
         </p:nvSpPr>
         <p:spPr>
           <a:xfrm>
+            <a:off x="6038557" y="2990088"/>
+            <a:ext cx="323557" cy="182880"/>
+          </a:xfrm>
+          <a:prstGeom prst="rect">
+            <a:avLst/>
+          </a:prstGeom>
+          <a:solidFill>
+            <a:srgbClr val="ED7D31"/>
+          </a:solidFill>
+          <a:ln>
+            <a:noFill/>
+          </a:ln>
+        </p:spPr>
+      </p:sp>
+      <p:sp>
+        <p:nvSpPr>
+          <p:cNvPr id="31" name="Shape 31"/>
+          <p:cNvSpPr/>
+          <p:nvPr/>
+        </p:nvSpPr>
+        <p:spPr>
+          <a:xfrm>
             <a:off x="6362114" y="2990088"/>
             <a:ext cx="1322363" cy="182880"/>
           </a:xfrm>
@@ -8221,7 +8243,7 @@
       </p:sp>
       <p:sp>
         <p:nvSpPr>
-          <p:cNvPr id="31" name="TextBox 31"/>
+          <p:cNvPr id="32" name="TextBox 32"/>
           <p:cNvSpPr txBox="1"/>
           <p:nvPr/>
         </p:nvSpPr>
@@ -8261,21 +8283,21 @@
                 <a:latin typeface="Arial"/>
                 <a:cs typeface="Arial"/>
               </a:rPr>
-              <a:t>1997–98</a:t>
-            </a:r>
-          </a:p>
-        </p:txBody>
-      </p:sp>
-      <p:sp>
-        <p:nvSpPr>
-          <p:cNvPr id="32" name="TextBox 32"/>
+              <a:t>1997–98 ⚠</a:t>
+            </a:r>
+          </a:p>
+        </p:txBody>
+      </p:sp>
+      <p:sp>
+        <p:nvSpPr>
+          <p:cNvPr id="33" name="TextBox 33"/>
           <p:cNvSpPr txBox="1"/>
           <p:nvPr/>
         </p:nvSpPr>
         <p:spPr>
           <a:xfrm>
             <a:off x="3647049" y="2779776"/>
-            <a:ext cx="2926080" cy="182880"/>
+            <a:ext cx="3108960" cy="182880"/>
           </a:xfrm>
           <a:prstGeom prst="rect">
             <a:avLst/>
@@ -8308,14 +8330,14 @@
                 <a:latin typeface="Arial"/>
                 <a:cs typeface="Arial"/>
               </a:rPr>
-              <a:t>resistance lost, April 2017</a:t>
-            </a:r>
-          </a:p>
-        </p:txBody>
-      </p:sp>
-      <p:sp>
-        <p:nvSpPr>
-          <p:cNvPr id="33" name="TextBox 33"/>
+              <a:t>weakening from 2015 ⚠; loss confirmed April 2017</a:t>
+            </a:r>
+          </a:p>
+        </p:txBody>
+      </p:sp>
+      <p:sp>
+        <p:nvSpPr>
+          <p:cNvPr id="34" name="TextBox 34"/>
           <p:cNvSpPr txBox="1"/>
           <p:nvPr/>
         </p:nvSpPr>
@@ -8383,14 +8405,14 @@
       </p:sp>
       <p:sp>
         <p:nvSpPr>
-          <p:cNvPr id="34" name="Shape 34"/>
+          <p:cNvPr id="35" name="Shape 35"/>
           <p:cNvSpPr/>
           <p:nvPr/>
         </p:nvSpPr>
         <p:spPr>
           <a:xfrm>
             <a:off x="4491111" y="3630168"/>
-            <a:ext cx="3193366" cy="182880"/>
+            <a:ext cx="2447778" cy="182880"/>
           </a:xfrm>
           <a:prstGeom prst="rect">
             <a:avLst/>
@@ -8405,7 +8427,29 @@
       </p:sp>
       <p:sp>
         <p:nvSpPr>
-          <p:cNvPr id="35" name="TextBox 35"/>
+          <p:cNvPr id="36" name="Shape 36"/>
+          <p:cNvSpPr/>
+          <p:nvPr/>
+        </p:nvSpPr>
+        <p:spPr>
+          <a:xfrm>
+            <a:off x="6938889" y="3630168"/>
+            <a:ext cx="745588" cy="182880"/>
+          </a:xfrm>
+          <a:prstGeom prst="rect">
+            <a:avLst/>
+          </a:prstGeom>
+          <a:solidFill>
+            <a:srgbClr val="A9D18E"/>
+          </a:solidFill>
+          <a:ln>
+            <a:noFill/>
+          </a:ln>
+        </p:spPr>
+      </p:sp>
+      <p:sp>
+        <p:nvSpPr>
+          <p:cNvPr id="37" name="TextBox 37"/>
           <p:cNvSpPr txBox="1"/>
           <p:nvPr/>
         </p:nvSpPr>
@@ -8445,21 +8489,21 @@
                 <a:latin typeface="Arial"/>
                 <a:cs typeface="Arial"/>
               </a:rPr>
-              <a:t>2004</a:t>
-            </a:r>
-          </a:p>
-        </p:txBody>
-      </p:sp>
-      <p:sp>
-        <p:nvSpPr>
-          <p:cNvPr id="36" name="TextBox 36"/>
+              <a:t>2004 ⚠</a:t>
+            </a:r>
+          </a:p>
+        </p:txBody>
+      </p:sp>
+      <p:sp>
+        <p:nvSpPr>
+          <p:cNvPr id="38" name="TextBox 38"/>
           <p:cNvSpPr txBox="1"/>
           <p:nvPr/>
         </p:nvSpPr>
         <p:spPr>
           <a:xfrm>
             <a:off x="4491111" y="3419856"/>
-            <a:ext cx="2926080" cy="182880"/>
+            <a:ext cx="3108960" cy="182880"/>
           </a:xfrm>
           <a:prstGeom prst="rect">
             <a:avLst/>
@@ -8492,14 +8536,14 @@
                 <a:latin typeface="Arial"/>
                 <a:cs typeface="Arial"/>
               </a:rPr>
-              <a:t>still resistant (IHCAFE, 2020–21)</a:t>
-            </a:r>
-          </a:p>
-        </p:txBody>
-      </p:sp>
-      <p:sp>
-        <p:nvSpPr>
-          <p:cNvPr id="37" name="TextBox 37"/>
+              <a:t>resistant per IHCAFE until May 2021; not re-confirmed since</a:t>
+            </a:r>
+          </a:p>
+        </p:txBody>
+      </p:sp>
+      <p:sp>
+        <p:nvSpPr>
+          <p:cNvPr id="39" name="TextBox 39"/>
           <p:cNvSpPr txBox="1"/>
           <p:nvPr/>
         </p:nvSpPr>
@@ -8560,14 +8604,14 @@
                 <a:latin typeface="Arial"/>
                 <a:cs typeface="Arial"/>
               </a:rPr>
-              <a:t>3 varieties</a:t>
-            </a:r>
-          </a:p>
-        </p:txBody>
-      </p:sp>
-      <p:sp>
-        <p:nvSpPr>
-          <p:cNvPr id="38" name="Shape 38"/>
+              <a:t>bred in Brazil / Guatemala</a:t>
+            </a:r>
+          </a:p>
+        </p:txBody>
+      </p:sp>
+      <p:sp>
+        <p:nvSpPr>
+          <p:cNvPr id="40" name="Shape 40"/>
           <p:cNvSpPr/>
           <p:nvPr/>
         </p:nvSpPr>
@@ -8589,7 +8633,7 @@
       </p:sp>
       <p:sp>
         <p:nvSpPr>
-          <p:cNvPr id="39" name="TextBox 39"/>
+          <p:cNvPr id="41" name="TextBox 41"/>
           <p:cNvSpPr txBox="1"/>
           <p:nvPr/>
         </p:nvSpPr>
@@ -8629,21 +8673,21 @@
                 <a:latin typeface="Arial"/>
                 <a:cs typeface="Arial"/>
               </a:rPr>
-              <a:t>Feb 2024</a:t>
-            </a:r>
-          </a:p>
-        </p:txBody>
-      </p:sp>
-      <p:sp>
-        <p:nvSpPr>
-          <p:cNvPr id="40" name="TextBox 40"/>
-          <p:cNvSpPr txBox="1"/>
-          <p:nvPr/>
-        </p:nvSpPr>
-        <p:spPr>
-          <a:xfrm>
-            <a:off x="4758397" y="4059936"/>
-            <a:ext cx="2926080" cy="182880"/>
+              <a:t>2024 ⚠</a:t>
+            </a:r>
+          </a:p>
+        </p:txBody>
+      </p:sp>
+      <p:sp>
+        <p:nvSpPr>
+          <p:cNvPr id="42" name="TextBox 42"/>
+          <p:cNvSpPr txBox="1"/>
+          <p:nvPr/>
+        </p:nvSpPr>
+        <p:spPr>
+          <a:xfrm>
+            <a:off x="4575517" y="4059936"/>
+            <a:ext cx="3108960" cy="182880"/>
           </a:xfrm>
           <a:prstGeom prst="rect">
             <a:avLst/>
@@ -8683,7 +8727,7 @@
       </p:sp>
       <p:sp>
         <p:nvSpPr>
-          <p:cNvPr id="41" name="TextBox 41"/>
+          <p:cNvPr id="43" name="TextBox 43"/>
           <p:cNvSpPr txBox="1"/>
           <p:nvPr/>
         </p:nvSpPr>
@@ -8723,7 +8767,7 @@
                 <a:latin typeface="Arial"/>
                 <a:cs typeface="Arial"/>
               </a:rPr>
-              <a:t>4 more varieties</a:t>
+              <a:t>2 more varieties</a:t>
             </a:r>
           </a:p>
           <a:p>
@@ -8744,14 +8788,14 @@
                 <a:latin typeface="Arial"/>
                 <a:cs typeface="Arial"/>
               </a:rPr>
-              <a:t>announced</a:t>
-            </a:r>
-          </a:p>
-        </p:txBody>
-      </p:sp>
-      <p:sp>
-        <p:nvSpPr>
-          <p:cNvPr id="42" name="Shape 42"/>
+              <a:t>in release process</a:t>
+            </a:r>
+          </a:p>
+        </p:txBody>
+      </p:sp>
+      <p:sp>
+        <p:nvSpPr>
+          <p:cNvPr id="44" name="Shape 44"/>
           <p:cNvSpPr/>
           <p:nvPr/>
         </p:nvSpPr>
@@ -8773,14 +8817,14 @@
       </p:sp>
       <p:sp>
         <p:nvSpPr>
-          <p:cNvPr id="43" name="TextBox 43"/>
-          <p:cNvSpPr txBox="1"/>
-          <p:nvPr/>
-        </p:nvSpPr>
-        <p:spPr>
-          <a:xfrm>
-            <a:off x="4758397" y="4700016"/>
-            <a:ext cx="2926080" cy="182880"/>
+          <p:cNvPr id="45" name="TextBox 45"/>
+          <p:cNvSpPr txBox="1"/>
+          <p:nvPr/>
+        </p:nvSpPr>
+        <p:spPr>
+          <a:xfrm>
+            <a:off x="4575517" y="4700016"/>
+            <a:ext cx="3108960" cy="182880"/>
           </a:xfrm>
           <a:prstGeom prst="rect">
             <a:avLst/>
@@ -8813,14 +8857,14 @@
                 <a:latin typeface="Arial"/>
                 <a:cs typeface="Arial"/>
               </a:rPr>
-              <a:t>in preparation ⚠</a:t>
-            </a:r>
-          </a:p>
-        </p:txBody>
-      </p:sp>
-      <p:sp>
-        <p:nvSpPr>
-          <p:cNvPr id="44" name="Shape 44"/>
+              <a:t>announced early 2026 ⚠</a:t>
+            </a:r>
+          </a:p>
+        </p:txBody>
+      </p:sp>
+      <p:sp>
+        <p:nvSpPr>
+          <p:cNvPr id="46" name="Shape 46"/>
           <p:cNvSpPr/>
           <p:nvPr/>
         </p:nvSpPr>
@@ -8842,7 +8886,7 @@
       </p:sp>
       <p:sp>
         <p:nvSpPr>
-          <p:cNvPr id="45" name="Shape 45"/>
+          <p:cNvPr id="47" name="Shape 47"/>
           <p:cNvSpPr/>
           <p:nvPr/>
         </p:nvSpPr>
@@ -8864,7 +8908,7 @@
       </p:sp>
       <p:sp>
         <p:nvSpPr>
-          <p:cNvPr id="46" name="TextBox 46"/>
+          <p:cNvPr id="48" name="TextBox 48"/>
           <p:cNvSpPr txBox="1"/>
           <p:nvPr/>
         </p:nvSpPr>
@@ -8932,89 +8976,20 @@
       </p:sp>
       <p:sp>
         <p:nvSpPr>
-          <p:cNvPr id="47" name="Shape 47"/>
-          <p:cNvSpPr/>
-          <p:nvPr/>
-        </p:nvSpPr>
-        <p:spPr>
-          <a:xfrm>
-            <a:off x="2286000" y="5833872"/>
-            <a:ext cx="164592" cy="128016"/>
-          </a:xfrm>
-          <a:prstGeom prst="rect">
-            <a:avLst/>
-          </a:prstGeom>
-          <a:solidFill>
-            <a:srgbClr val="2E7D32"/>
-          </a:solidFill>
-          <a:ln>
-            <a:noFill/>
-          </a:ln>
-        </p:spPr>
-      </p:sp>
-      <p:sp>
-        <p:nvSpPr>
-          <p:cNvPr id="48" name="TextBox 48"/>
-          <p:cNvSpPr txBox="1"/>
-          <p:nvPr/>
-        </p:nvSpPr>
-        <p:spPr>
-          <a:xfrm>
-            <a:off x="2569464" y="5797296"/>
-            <a:ext cx="2926080" cy="201168"/>
-          </a:xfrm>
-          <a:prstGeom prst="rect">
-            <a:avLst/>
-          </a:prstGeom>
-          <a:noFill/>
-          <a:ln>
-            <a:noFill/>
-          </a:ln>
-        </p:spPr>
-        <p:txBody>
-          <a:bodyPr wrap="square" lIns="0" tIns="0" rIns="0" bIns="0" anchor="t" rtlCol="0">
-            <a:noAutofit/>
-          </a:bodyPr>
-          <a:lstStyle/>
-          <a:p>
-            <a:pPr algn="l" marL="0" indent="0">
-              <a:spcBef>
-                <a:spcPts val="0"/>
-              </a:spcBef>
-              <a:spcAft>
-                <a:spcPts val="0"/>
-              </a:spcAft>
-              <a:buNone/>
-            </a:pPr>
-            <a:r>
-              <a:rPr lang="en-GB" sz="800" dirty="0">
-                <a:solidFill>
-                  <a:srgbClr val="262626"/>
-                </a:solidFill>
-                <a:latin typeface="Arial"/>
-                <a:cs typeface="Arial"/>
-              </a:rPr>
-              <a:t>resistant</a:t>
-            </a:r>
-          </a:p>
-        </p:txBody>
-      </p:sp>
-      <p:sp>
-        <p:nvSpPr>
           <p:cNvPr id="49" name="Shape 49"/>
           <p:cNvSpPr/>
           <p:nvPr/>
         </p:nvSpPr>
         <p:spPr>
           <a:xfrm>
-            <a:off x="3145170" y="5833872"/>
+            <a:off x="640080" y="5833872"/>
             <a:ext cx="164592" cy="128016"/>
           </a:xfrm>
           <a:prstGeom prst="rect">
             <a:avLst/>
           </a:prstGeom>
           <a:solidFill>
-            <a:srgbClr val="C00000"/>
+            <a:srgbClr val="2E7D32"/>
           </a:solidFill>
           <a:ln>
             <a:noFill/>
@@ -9029,7 +9004,7 @@
         </p:nvSpPr>
         <p:spPr>
           <a:xfrm>
-            <a:off x="3428634" y="5797296"/>
+            <a:off x="923544" y="5797296"/>
             <a:ext cx="2926080" cy="201168"/>
           </a:xfrm>
           <a:prstGeom prst="rect">
@@ -9063,7 +9038,7 @@
                 <a:latin typeface="Arial"/>
                 <a:cs typeface="Arial"/>
               </a:rPr>
-              <a:t>resistance broken</a:t>
+              <a:t>resistant</a:t>
             </a:r>
           </a:p>
         </p:txBody>
@@ -9076,13 +9051,220 @@
         </p:nvSpPr>
         <p:spPr>
           <a:xfrm>
-            <a:off x="4402287" y="5833872"/>
+            <a:off x="1499250" y="5833872"/>
             <a:ext cx="164592" cy="128016"/>
           </a:xfrm>
           <a:prstGeom prst="rect">
             <a:avLst/>
           </a:prstGeom>
           <a:solidFill>
+            <a:srgbClr val="ED7D31"/>
+          </a:solidFill>
+          <a:ln>
+            <a:noFill/>
+          </a:ln>
+        </p:spPr>
+      </p:sp>
+      <p:sp>
+        <p:nvSpPr>
+          <p:cNvPr id="52" name="TextBox 52"/>
+          <p:cNvSpPr txBox="1"/>
+          <p:nvPr/>
+        </p:nvSpPr>
+        <p:spPr>
+          <a:xfrm>
+            <a:off x="1782714" y="5797296"/>
+            <a:ext cx="2926080" cy="201168"/>
+          </a:xfrm>
+          <a:prstGeom prst="rect">
+            <a:avLst/>
+          </a:prstGeom>
+          <a:noFill/>
+          <a:ln>
+            <a:noFill/>
+          </a:ln>
+        </p:spPr>
+        <p:txBody>
+          <a:bodyPr wrap="square" lIns="0" tIns="0" rIns="0" bIns="0" anchor="t" rtlCol="0">
+            <a:noAutofit/>
+          </a:bodyPr>
+          <a:lstStyle/>
+          <a:p>
+            <a:pPr algn="l" marL="0" indent="0">
+              <a:spcBef>
+                <a:spcPts val="0"/>
+              </a:spcBef>
+              <a:spcAft>
+                <a:spcPts val="0"/>
+              </a:spcAft>
+              <a:buNone/>
+            </a:pPr>
+            <a:r>
+              <a:rPr lang="en-GB" sz="800" dirty="0">
+                <a:solidFill>
+                  <a:srgbClr val="262626"/>
+                </a:solidFill>
+                <a:latin typeface="Arial"/>
+                <a:cs typeface="Arial"/>
+              </a:rPr>
+              <a:t>weakening / partial</a:t>
+            </a:r>
+          </a:p>
+        </p:txBody>
+      </p:sp>
+      <p:sp>
+        <p:nvSpPr>
+          <p:cNvPr id="53" name="Shape 53"/>
+          <p:cNvSpPr/>
+          <p:nvPr/>
+        </p:nvSpPr>
+        <p:spPr>
+          <a:xfrm>
+            <a:off x="2855854" y="5833872"/>
+            <a:ext cx="164592" cy="128016"/>
+          </a:xfrm>
+          <a:prstGeom prst="rect">
+            <a:avLst/>
+          </a:prstGeom>
+          <a:solidFill>
+            <a:srgbClr val="C00000"/>
+          </a:solidFill>
+          <a:ln>
+            <a:noFill/>
+          </a:ln>
+        </p:spPr>
+      </p:sp>
+      <p:sp>
+        <p:nvSpPr>
+          <p:cNvPr id="54" name="TextBox 54"/>
+          <p:cNvSpPr txBox="1"/>
+          <p:nvPr/>
+        </p:nvSpPr>
+        <p:spPr>
+          <a:xfrm>
+            <a:off x="3139318" y="5797296"/>
+            <a:ext cx="2926080" cy="201168"/>
+          </a:xfrm>
+          <a:prstGeom prst="rect">
+            <a:avLst/>
+          </a:prstGeom>
+          <a:noFill/>
+          <a:ln>
+            <a:noFill/>
+          </a:ln>
+        </p:spPr>
+        <p:txBody>
+          <a:bodyPr wrap="square" lIns="0" tIns="0" rIns="0" bIns="0" anchor="t" rtlCol="0">
+            <a:noAutofit/>
+          </a:bodyPr>
+          <a:lstStyle/>
+          <a:p>
+            <a:pPr algn="l" marL="0" indent="0">
+              <a:spcBef>
+                <a:spcPts val="0"/>
+              </a:spcBef>
+              <a:spcAft>
+                <a:spcPts val="0"/>
+              </a:spcAft>
+              <a:buNone/>
+            </a:pPr>
+            <a:r>
+              <a:rPr lang="en-GB" sz="800" dirty="0">
+                <a:solidFill>
+                  <a:srgbClr val="262626"/>
+                </a:solidFill>
+                <a:latin typeface="Arial"/>
+                <a:cs typeface="Arial"/>
+              </a:rPr>
+              <a:t>broken</a:t>
+            </a:r>
+          </a:p>
+        </p:txBody>
+      </p:sp>
+      <p:sp>
+        <p:nvSpPr>
+          <p:cNvPr id="55" name="Shape 55"/>
+          <p:cNvSpPr/>
+          <p:nvPr/>
+        </p:nvSpPr>
+        <p:spPr>
+          <a:xfrm>
+            <a:off x="3565794" y="5833872"/>
+            <a:ext cx="164592" cy="128016"/>
+          </a:xfrm>
+          <a:prstGeom prst="rect">
+            <a:avLst/>
+          </a:prstGeom>
+          <a:solidFill>
+            <a:srgbClr val="A9D18E"/>
+          </a:solidFill>
+          <a:ln>
+            <a:noFill/>
+          </a:ln>
+        </p:spPr>
+      </p:sp>
+      <p:sp>
+        <p:nvSpPr>
+          <p:cNvPr id="56" name="TextBox 56"/>
+          <p:cNvSpPr txBox="1"/>
+          <p:nvPr/>
+        </p:nvSpPr>
+        <p:spPr>
+          <a:xfrm>
+            <a:off x="3849258" y="5797296"/>
+            <a:ext cx="2926080" cy="201168"/>
+          </a:xfrm>
+          <a:prstGeom prst="rect">
+            <a:avLst/>
+          </a:prstGeom>
+          <a:noFill/>
+          <a:ln>
+            <a:noFill/>
+          </a:ln>
+        </p:spPr>
+        <p:txBody>
+          <a:bodyPr wrap="square" lIns="0" tIns="0" rIns="0" bIns="0" anchor="t" rtlCol="0">
+            <a:noAutofit/>
+          </a:bodyPr>
+          <a:lstStyle/>
+          <a:p>
+            <a:pPr algn="l" marL="0" indent="0">
+              <a:spcBef>
+                <a:spcPts val="0"/>
+              </a:spcBef>
+              <a:spcAft>
+                <a:spcPts val="0"/>
+              </a:spcAft>
+              <a:buNone/>
+            </a:pPr>
+            <a:r>
+              <a:rPr lang="en-GB" sz="800" dirty="0">
+                <a:solidFill>
+                  <a:srgbClr val="262626"/>
+                </a:solidFill>
+                <a:latin typeface="Arial"/>
+                <a:cs typeface="Arial"/>
+              </a:rPr>
+              <a:t>not re-confirmed</a:t>
+            </a:r>
+          </a:p>
+        </p:txBody>
+      </p:sp>
+      <p:sp>
+        <p:nvSpPr>
+          <p:cNvPr id="57" name="Shape 57"/>
+          <p:cNvSpPr/>
+          <p:nvPr/>
+        </p:nvSpPr>
+        <p:spPr>
+          <a:xfrm>
+            <a:off x="4773168" y="5833872"/>
+            <a:ext cx="164592" cy="128016"/>
+          </a:xfrm>
+          <a:prstGeom prst="rect">
+            <a:avLst/>
+          </a:prstGeom>
+          <a:solidFill>
             <a:srgbClr val="BFBFBF"/>
           </a:solidFill>
           <a:ln>
@@ -9092,13 +9274,13 @@
       </p:sp>
       <p:sp>
         <p:nvSpPr>
-          <p:cNvPr id="52" name="TextBox 52"/>
-          <p:cNvSpPr txBox="1"/>
-          <p:nvPr/>
-        </p:nvSpPr>
-        <p:spPr>
-          <a:xfrm>
-            <a:off x="4685751" y="5797296"/>
+          <p:cNvPr id="58" name="TextBox 58"/>
+          <p:cNvSpPr txBox="1"/>
+          <p:nvPr/>
+        </p:nvSpPr>
+        <p:spPr>
+          <a:xfrm>
+            <a:off x="5056632" y="5797296"/>
             <a:ext cx="2926080" cy="201168"/>
           </a:xfrm>
           <a:prstGeom prst="rect">
@@ -9132,14 +9314,14 @@
                 <a:latin typeface="Arial"/>
                 <a:cs typeface="Arial"/>
               </a:rPr>
-              <a:t>not confirmed / pending</a:t>
-            </a:r>
-          </a:p>
-        </p:txBody>
-      </p:sp>
-      <p:sp>
-        <p:nvSpPr>
-          <p:cNvPr id="53" name="TextBox 53"/>
+              <a:t>pending</a:t>
+            </a:r>
+          </a:p>
+        </p:txBody>
+      </p:sp>
+      <p:sp>
+        <p:nvSpPr>
+          <p:cNvPr id="59" name="TextBox 59"/>
           <p:cNvSpPr txBox="1"/>
           <p:nvPr/>
         </p:nvSpPr>
@@ -9188,7 +9370,7 @@
       </p:sp>
       <p:sp>
         <p:nvSpPr>
-          <p:cNvPr id="54" name="TextBox 54"/>
+          <p:cNvPr id="60" name="TextBox 60"/>
           <p:cNvSpPr txBox="1"/>
           <p:nvPr/>
         </p:nvSpPr>
@@ -9237,7 +9419,7 @@
       </p:sp>
       <p:sp>
         <p:nvSpPr>
-          <p:cNvPr id="55" name="TextBox 55"/>
+          <p:cNvPr id="61" name="TextBox 61"/>
           <p:cNvSpPr txBox="1"/>
           <p:nvPr/>
         </p:nvSpPr>
@@ -9286,7 +9468,7 @@
       </p:sp>
       <p:sp>
         <p:nvSpPr>
-          <p:cNvPr id="56" name="TextBox 56"/>
+          <p:cNvPr id="62" name="TextBox 62"/>
           <p:cNvSpPr txBox="1"/>
           <p:nvPr/>
         </p:nvSpPr>
@@ -9335,7 +9517,7 @@
       </p:sp>
       <p:sp>
         <p:nvSpPr>
-          <p:cNvPr id="57" name="TextBox 57"/>
+          <p:cNvPr id="63" name="TextBox 63"/>
           <p:cNvSpPr txBox="1"/>
           <p:nvPr/>
         </p:nvSpPr>
@@ -9384,7 +9566,7 @@
       </p:sp>
       <p:sp>
         <p:nvSpPr>
-          <p:cNvPr id="58" name="TextBox 58"/>
+          <p:cNvPr id="64" name="TextBox 64"/>
           <p:cNvSpPr txBox="1"/>
           <p:nvPr/>
         </p:nvSpPr>
@@ -9433,7 +9615,7 @@
       </p:sp>
       <p:sp>
         <p:nvSpPr>
-          <p:cNvPr id="59" name="TextBox 59"/>
+          <p:cNvPr id="65" name="TextBox 65"/>
           <p:cNvSpPr txBox="1"/>
           <p:nvPr/>
         </p:nvSpPr>
@@ -9482,7 +9664,7 @@
       </p:sp>
       <p:sp>
         <p:nvSpPr>
-          <p:cNvPr id="60" name="TextBox 60"/>
+          <p:cNvPr id="66" name="TextBox 66"/>
           <p:cNvSpPr txBox="1"/>
           <p:nvPr/>
         </p:nvSpPr>
@@ -9531,7 +9713,7 @@
       </p:sp>
       <p:sp>
         <p:nvSpPr>
-          <p:cNvPr id="61" name="TextBox 61"/>
+          <p:cNvPr id="67" name="TextBox 67"/>
           <p:cNvSpPr txBox="1"/>
           <p:nvPr/>
         </p:nvSpPr>
@@ -9580,7 +9762,7 @@
       </p:sp>
       <p:sp>
         <p:nvSpPr>
-          <p:cNvPr id="62" name="TextBox 62"/>
+          <p:cNvPr id="68" name="TextBox 68"/>
           <p:cNvSpPr txBox="1"/>
           <p:nvPr/>
         </p:nvSpPr>
@@ -9629,7 +9811,7 @@
       </p:sp>
       <p:sp>
         <p:nvSpPr>
-          <p:cNvPr id="63" name="TextBox 63"/>
+          <p:cNvPr id="69" name="TextBox 69"/>
           <p:cNvSpPr txBox="1"/>
           <p:nvPr/>
         </p:nvSpPr>
@@ -9678,7 +9860,7 @@
       </p:sp>
       <p:sp>
         <p:nvSpPr>
-          <p:cNvPr id="64" name="TextBox 64"/>
+          <p:cNvPr id="70" name="TextBox 70"/>
           <p:cNvSpPr txBox="1"/>
           <p:nvPr/>
         </p:nvSpPr>
@@ -9727,7 +9909,7 @@
       </p:sp>
       <p:sp>
         <p:nvSpPr>
-          <p:cNvPr id="65" name="TextBox 65"/>
+          <p:cNvPr id="71" name="TextBox 71"/>
           <p:cNvSpPr txBox="1"/>
           <p:nvPr/>
         </p:nvSpPr>
@@ -9776,7 +9958,7 @@
       </p:sp>
       <p:sp>
         <p:nvSpPr>
-          <p:cNvPr id="66" name="TextBox 66"/>
+          <p:cNvPr id="72" name="TextBox 72"/>
           <p:cNvSpPr txBox="1"/>
           <p:nvPr/>
         </p:nvSpPr>
@@ -9825,7 +10007,7 @@
       </p:sp>
       <p:sp>
         <p:nvSpPr>
-          <p:cNvPr id="67" name="TextBox 67"/>
+          <p:cNvPr id="73" name="TextBox 73"/>
           <p:cNvSpPr txBox="1"/>
           <p:nvPr/>
         </p:nvSpPr>
@@ -9874,7 +10056,7 @@
       </p:sp>
       <p:sp>
         <p:nvSpPr>
-          <p:cNvPr id="68" name="TextBox 68"/>
+          <p:cNvPr id="74" name="TextBox 74"/>
           <p:cNvSpPr txBox="1"/>
           <p:nvPr/>
         </p:nvSpPr>
@@ -9923,7 +10105,7 @@
       </p:sp>
       <p:sp>
         <p:nvSpPr>
-          <p:cNvPr id="69" name="TextBox 69"/>
+          <p:cNvPr id="75" name="TextBox 75"/>
           <p:cNvSpPr txBox="1"/>
           <p:nvPr/>
         </p:nvSpPr>
@@ -9972,7 +10154,7 @@
       </p:sp>
       <p:sp>
         <p:nvSpPr>
-          <p:cNvPr id="70" name="TextBox 70"/>
+          <p:cNvPr id="76" name="TextBox 76"/>
           <p:cNvSpPr txBox="1"/>
           <p:nvPr/>
         </p:nvSpPr>
@@ -10021,7 +10203,7 @@
       </p:sp>
       <p:sp>
         <p:nvSpPr>
-          <p:cNvPr id="71" name="TextBox 71"/>
+          <p:cNvPr id="77" name="TextBox 77"/>
           <p:cNvSpPr txBox="1"/>
           <p:nvPr/>
         </p:nvSpPr>
@@ -10070,7 +10252,7 @@
       </p:sp>
       <p:sp>
         <p:nvSpPr>
-          <p:cNvPr id="72" name="TextBox 72"/>
+          <p:cNvPr id="78" name="TextBox 78"/>
           <p:cNvSpPr txBox="1"/>
           <p:nvPr/>
         </p:nvSpPr>
@@ -10112,14 +10294,14 @@
                 <a:latin typeface="Arial"/>
                 <a:cs typeface="Arial"/>
               </a:rPr>
-              <a:t>Lempira alone = 56,08 % of sampled farms</a:t>
-            </a:r>
-          </a:p>
-        </p:txBody>
-      </p:sp>
-      <p:sp>
-        <p:nvSpPr>
-          <p:cNvPr id="73" name="TextBox 73"/>
+              <a:t>Lempira = 56 % of monitored farms → still resistant ≈ 17 %</a:t>
+            </a:r>
+          </a:p>
+        </p:txBody>
+      </p:sp>
+      <p:sp>
+        <p:nvSpPr>
+          <p:cNvPr id="79" name="TextBox 79"/>
           <p:cNvSpPr txBox="1"/>
           <p:nvPr/>
         </p:nvSpPr>
@@ -10168,7 +10350,7 @@
       </p:sp>
       <p:sp>
         <p:nvSpPr>
-          <p:cNvPr id="74" name="TextBox 74"/>
+          <p:cNvPr id="80" name="TextBox 80"/>
           <p:cNvSpPr txBox="1"/>
           <p:nvPr/>
         </p:nvSpPr>
@@ -10217,7 +10399,7 @@
       </p:sp>
       <p:sp>
         <p:nvSpPr>
-          <p:cNvPr id="75" name="TextBox 75"/>
+          <p:cNvPr id="81" name="TextBox 81"/>
           <p:cNvSpPr txBox="1"/>
           <p:nvPr/>
         </p:nvSpPr>
@@ -10266,7 +10448,7 @@
       </p:sp>
       <p:sp>
         <p:nvSpPr>
-          <p:cNvPr id="76" name="TextBox 76"/>
+          <p:cNvPr id="82" name="TextBox 82"/>
           <p:cNvSpPr txBox="1"/>
           <p:nvPr/>
         </p:nvSpPr>
@@ -10315,7 +10497,7 @@
       </p:sp>
       <p:sp>
         <p:nvSpPr>
-          <p:cNvPr id="77" name="TextBox 77"/>
+          <p:cNvPr id="83" name="TextBox 83"/>
           <p:cNvSpPr txBox="1"/>
           <p:nvPr/>
         </p:nvSpPr>
@@ -10355,7 +10537,7 @@
                 <a:latin typeface="Arial"/>
                 <a:cs typeface="Arial"/>
               </a:rPr>
-              <a:t>Count of releases</a:t>
+              <a:t>Count of IHCAFE releases</a:t>
             </a:r>
           </a:p>
           <a:p>
@@ -10376,7 +10558,7 @@
                 <a:latin typeface="Arial"/>
                 <a:cs typeface="Arial"/>
               </a:rPr>
-              <a:t>1990–2004: 3 (IHCAFE 90, Lempira, Parainema)</a:t>
+              <a:t>1990–2004: 3 bred by IHCAFE (IHCAFE 90, Lempira, Parainema)</a:t>
             </a:r>
           </a:p>
           <a:p>
@@ -10397,7 +10579,7 @@
                 <a:latin typeface="Arial"/>
                 <a:cs typeface="Arial"/>
               </a:rPr>
-              <a:t>2005–2023: 0</a:t>
+              <a:t>2005–2023: none found</a:t>
             </a:r>
           </a:p>
           <a:p>
@@ -10418,7 +10600,7 @@
                 <a:latin typeface="Arial"/>
                 <a:cs typeface="Arial"/>
               </a:rPr>
-              <a:t>2024: 3 · announced: 4 more ⚠</a:t>
+              <a:t>2024: 3 bred abroad ⚠ · 2026: 2 in release process ⚠</a:t>
             </a:r>
           </a:p>
           <a:p>
@@ -10439,35 +10621,14 @@
                 <a:latin typeface="Arial"/>
                 <a:cs typeface="Arial"/>
               </a:rPr>
-              <a:t>Still called resistant by IHCAFE in 2020: Parainema only</a:t>
-            </a:r>
-          </a:p>
-          <a:p>
-            <a:pPr algn="l" marL="0" indent="0">
-              <a:spcBef>
-                <a:spcPts val="0"/>
-              </a:spcBef>
-              <a:spcAft>
-                <a:spcPts val="0"/>
-              </a:spcAft>
-              <a:buNone/>
-            </a:pPr>
-            <a:r>
-              <a:rPr lang="en-GB" sz="800" b="1" dirty="0">
-                <a:solidFill>
-                  <a:srgbClr val="C00000"/>
-                </a:solidFill>
-                <a:latin typeface="Arial"/>
-                <a:cs typeface="Arial"/>
-              </a:rPr>
-              <a:t>After Lempira broke: ≈ 3–4 % of the park still resistant ⚠</a:t>
-            </a:r>
-          </a:p>
-        </p:txBody>
-      </p:sp>
-      <p:sp>
-        <p:nvSpPr>
-          <p:cNvPr id="78" name="TextBox 78"/>
+              <a:t>USDA 2020–21 names only Parainema as still resistant</a:t>
+            </a:r>
+          </a:p>
+        </p:txBody>
+      </p:sp>
+      <p:sp>
+        <p:nvSpPr>
+          <p:cNvPr id="84" name="TextBox 84"/>
           <p:cNvSpPr txBox="1"/>
           <p:nvPr/>
         </p:nvSpPr>
@@ -10507,7 +10668,7 @@
                 <a:latin typeface="Arial"/>
                 <a:cs typeface="Arial"/>
               </a:rPr>
-              <a:t>Sources: USDA FAS Coffee Annual Honduras 2013, 2014, 2017, 2018, 2020, 2021, 2025 (resistance status, adoption, strains, PAPP); release years 1997–98 (Lempira) and 2004 (Parainema), the 2024 releases and the 56 % Lempira share (IHCAFE SAT bulletin No 8, Oct 2017) come from web-search extracts (⚠): the IHCAFE, WCR and press pages could not be opened from here.</a:t>
+              <a:t>✔ USDA FAS Coffee Annual Honduras 2013–2025. ⚠ web extracts (pages blocked here): release years; Lempira weakening from 2015 (PROMECAFE 2019); IHCAFE 90 at 80 % (La Prensa 2017); IHCAFE SAT bulletin No 8, Oct 2017: Lempira = 56,08 % of monitored farms and 67,74 % of susceptible ones → susceptible 82,8 %, resistant 17,2 %; 2024 and 2026 releases.</a:t>
             </a:r>
           </a:p>
         </p:txBody>

--- a/research/honduras/slides/Honduras_price_finance_varieties.pptx
+++ b/research/honduras/slides/Honduras_price_finance_varieties.pptx
@@ -1212,7 +1212,7 @@
             <c:bubble3D val="0"/>
             <c:spPr>
               <a:solidFill>
-                <a:srgbClr val="A6A6A6"/>
+                <a:srgbClr val="1F3864"/>
               </a:solidFill>
             </c:spPr>
           </c:dPt>
@@ -1242,7 +1242,7 @@
             <c:bubble3D val="0"/>
             <c:spPr>
               <a:solidFill>
-                <a:srgbClr val="A6A6A6"/>
+                <a:srgbClr val="1F3864"/>
               </a:solidFill>
             </c:spPr>
           </c:dPt>
@@ -1327,7 +1327,7 @@
                   <c:v>77</c:v>
                 </c:pt>
                 <c:pt idx="4">
-                  <c:v>12.2</c:v>
+                  <c:v>12.6</c:v>
                 </c:pt>
                 <c:pt idx="5">
                   <c:v>12</c:v>
@@ -7174,7 +7174,7 @@
                 <a:latin typeface="Arial"/>
                 <a:cs typeface="Arial"/>
               </a:rPr>
-              <a:t>IHCAFE bred 3 rust-resistant varieties (1990–2004), none new until 2024; Lempira failed by 2017</a:t>
+              <a:t>IHCAFE bred 3 rust-resistant varieties (1990–2004), none new until 2024; Lempira failed in 2016</a:t>
             </a:r>
           </a:p>
         </p:txBody>
@@ -7225,7 +7225,7 @@
                 <a:latin typeface="Arial"/>
                 <a:cs typeface="Arial"/>
               </a:rPr>
-              <a:t>IHCAFE 90 (1990s), Lempira (1997–98 ⚠), Parainema (2004 ⚠), all with Timor Hybrid resistance. Feb 2024: Ihcatú 75, Anacafé 14, Obatá, bred abroad, released by IHCAFE ⚠</a:t>
+              <a:t>Released 1990, 1998, 2004 (IHCAFE study 2019 ✔, World Coffee Research ✔). Feb 2024: Ihcatú 75, Anacafé 14, Obatá, bred abroad and released by IHCAFE ✔</a:t>
             </a:r>
           </a:p>
           <a:p>
@@ -7250,7 +7250,7 @@
                 <a:latin typeface="Arial"/>
                 <a:cs typeface="Arial"/>
               </a:rPr>
-              <a:t>Planted: 50 % of the AREA resistant in 2013, 60 % of PRODUCERS in 2014 (two measures, not a trend). Lempira weakened from 2015 ⚠, loss confirmed April 2017</a:t>
+              <a:t>Planted: resistant varieties = 65 % of the area since 2012, mostly Lempira (IHCAFE ✔); USDA: 50 % of the area in 2013, 60 % of producers in 2014</a:t>
             </a:r>
           </a:p>
           <a:p>
@@ -7275,7 +7275,7 @@
                 <a:latin typeface="Arial"/>
                 <a:cs typeface="Arial"/>
               </a:rPr>
-              <a:t>After Lempira: ≈ 17 % of monitored farms kept a resistant variety (IHCAFE, Oct 2017 ⚠). Parainema last called resistant in May 2021 (USDA). No yield by variety found</a:t>
+              <a:t>Lempira: tolerant from 2002, susceptible in 2016, nationwide by 2019 (IHCAFE ✔). IHCAFE 90: 20 % of plants susceptible from 2016. Parainema: resistant to 2019–21</a:t>
             </a:r>
           </a:p>
         </p:txBody>
@@ -7909,7 +7909,7 @@
         </p:nvSpPr>
         <p:spPr>
           <a:xfrm>
-            <a:off x="411480" y="2286000"/>
+            <a:off x="411480" y="2331720"/>
             <a:ext cx="1828800" cy="365760"/>
           </a:xfrm>
           <a:prstGeom prst="rect">
@@ -7977,8 +7977,8 @@
         </p:nvSpPr>
         <p:spPr>
           <a:xfrm>
-            <a:off x="2521634" y="2350008"/>
-            <a:ext cx="3840480" cy="182880"/>
+            <a:off x="2521634" y="2395728"/>
+            <a:ext cx="3657600" cy="182880"/>
           </a:xfrm>
           <a:prstGeom prst="rect">
             <a:avLst/>
@@ -7999,8 +7999,8 @@
         </p:nvSpPr>
         <p:spPr>
           <a:xfrm>
-            <a:off x="6362114" y="2350008"/>
-            <a:ext cx="1322363" cy="182880"/>
+            <a:off x="6179234" y="2395728"/>
+            <a:ext cx="1505243" cy="182880"/>
           </a:xfrm>
           <a:prstGeom prst="rect">
             <a:avLst/>
@@ -8021,7 +8021,7 @@
         </p:nvSpPr>
         <p:spPr>
           <a:xfrm>
-            <a:off x="2018714" y="2551176"/>
+            <a:off x="2018714" y="2596896"/>
             <a:ext cx="1005840" cy="164592"/>
           </a:xfrm>
           <a:prstGeom prst="rect">
@@ -8055,7 +8055,7 @@
                 <a:latin typeface="Arial"/>
                 <a:cs typeface="Arial"/>
               </a:rPr>
-              <a:t>1990s</a:t>
+              <a:t>1990</a:t>
             </a:r>
           </a:p>
         </p:txBody>
@@ -8068,7 +8068,7 @@
         </p:nvSpPr>
         <p:spPr>
           <a:xfrm>
-            <a:off x="2521634" y="2139696"/>
+            <a:off x="2521634" y="2185416"/>
             <a:ext cx="3108960" cy="182880"/>
           </a:xfrm>
           <a:prstGeom prst="rect">
@@ -8102,7 +8102,7 @@
                 <a:latin typeface="Arial"/>
                 <a:cs typeface="Arial"/>
               </a:rPr>
-              <a:t>resistant per IHCAFE in 2018; ~80 % vs the new strain (2017 ⚠)</a:t>
+              <a:t>resistant 1990–2015; ~20 % of plants susceptible from 2016</a:t>
             </a:r>
           </a:p>
         </p:txBody>
@@ -8115,7 +8115,7 @@
         </p:nvSpPr>
         <p:spPr>
           <a:xfrm>
-            <a:off x="411480" y="2926080"/>
+            <a:off x="411480" y="3108960"/>
             <a:ext cx="1828800" cy="365760"/>
           </a:xfrm>
           <a:prstGeom prst="rect">
@@ -8183,8 +8183,8 @@
         </p:nvSpPr>
         <p:spPr>
           <a:xfrm>
-            <a:off x="3647049" y="2990088"/>
-            <a:ext cx="2391508" cy="182880"/>
+            <a:off x="3647049" y="3172968"/>
+            <a:ext cx="562708" cy="182880"/>
           </a:xfrm>
           <a:prstGeom prst="rect">
             <a:avLst/>
@@ -8205,8 +8205,8 @@
         </p:nvSpPr>
         <p:spPr>
           <a:xfrm>
-            <a:off x="6038557" y="2990088"/>
-            <a:ext cx="323557" cy="182880"/>
+            <a:off x="4209757" y="3172968"/>
+            <a:ext cx="1969477" cy="182880"/>
           </a:xfrm>
           <a:prstGeom prst="rect">
             <a:avLst/>
@@ -8227,8 +8227,8 @@
         </p:nvSpPr>
         <p:spPr>
           <a:xfrm>
-            <a:off x="6362114" y="2990088"/>
-            <a:ext cx="1322363" cy="182880"/>
+            <a:off x="6179234" y="3172968"/>
+            <a:ext cx="1505243" cy="182880"/>
           </a:xfrm>
           <a:prstGeom prst="rect">
             <a:avLst/>
@@ -8249,7 +8249,7 @@
         </p:nvSpPr>
         <p:spPr>
           <a:xfrm>
-            <a:off x="3144129" y="3191256"/>
+            <a:off x="3144129" y="3374136"/>
             <a:ext cx="1005840" cy="164592"/>
           </a:xfrm>
           <a:prstGeom prst="rect">
@@ -8283,7 +8283,7 @@
                 <a:latin typeface="Arial"/>
                 <a:cs typeface="Arial"/>
               </a:rPr>
-              <a:t>1997–98 ⚠</a:t>
+              <a:t>1998</a:t>
             </a:r>
           </a:p>
         </p:txBody>
@@ -8296,7 +8296,7 @@
         </p:nvSpPr>
         <p:spPr>
           <a:xfrm>
-            <a:off x="3647049" y="2779776"/>
+            <a:off x="3647049" y="2962656"/>
             <a:ext cx="3108960" cy="182880"/>
           </a:xfrm>
           <a:prstGeom prst="rect">
@@ -8330,7 +8330,7 @@
                 <a:latin typeface="Arial"/>
                 <a:cs typeface="Arial"/>
               </a:rPr>
-              <a:t>weakening from 2015 ⚠; loss confirmed April 2017</a:t>
+              <a:t>tolerant 2002–15 (rust seen from 2007); susceptible 2016</a:t>
             </a:r>
           </a:p>
         </p:txBody>
@@ -8343,7 +8343,7 @@
         </p:nvSpPr>
         <p:spPr>
           <a:xfrm>
-            <a:off x="411480" y="3566160"/>
+            <a:off x="411480" y="3886200"/>
             <a:ext cx="1828800" cy="365760"/>
           </a:xfrm>
           <a:prstGeom prst="rect">
@@ -8411,7 +8411,7 @@
         </p:nvSpPr>
         <p:spPr>
           <a:xfrm>
-            <a:off x="4491111" y="3630168"/>
+            <a:off x="4491111" y="3950208"/>
             <a:ext cx="2447778" cy="182880"/>
           </a:xfrm>
           <a:prstGeom prst="rect">
@@ -8433,7 +8433,7 @@
         </p:nvSpPr>
         <p:spPr>
           <a:xfrm>
-            <a:off x="6938889" y="3630168"/>
+            <a:off x="6938889" y="3950208"/>
             <a:ext cx="745588" cy="182880"/>
           </a:xfrm>
           <a:prstGeom prst="rect">
@@ -8455,7 +8455,7 @@
         </p:nvSpPr>
         <p:spPr>
           <a:xfrm>
-            <a:off x="3988191" y="3831336"/>
+            <a:off x="3988191" y="4151376"/>
             <a:ext cx="1005840" cy="164592"/>
           </a:xfrm>
           <a:prstGeom prst="rect">
@@ -8489,7 +8489,7 @@
                 <a:latin typeface="Arial"/>
                 <a:cs typeface="Arial"/>
               </a:rPr>
-              <a:t>2004 ⚠</a:t>
+              <a:t>2004</a:t>
             </a:r>
           </a:p>
         </p:txBody>
@@ -8502,7 +8502,7 @@
         </p:nvSpPr>
         <p:spPr>
           <a:xfrm>
-            <a:off x="4491111" y="3419856"/>
+            <a:off x="4491111" y="3739896"/>
             <a:ext cx="3108960" cy="182880"/>
           </a:xfrm>
           <a:prstGeom prst="rect">
@@ -8536,7 +8536,7 @@
                 <a:latin typeface="Arial"/>
                 <a:cs typeface="Arial"/>
               </a:rPr>
-              <a:t>resistant per IHCAFE until May 2021; not re-confirmed since</a:t>
+              <a:t>resistant in IHCAFE tests to 2019, per USDA to 2021</a:t>
             </a:r>
           </a:p>
         </p:txBody>
@@ -8549,7 +8549,7 @@
         </p:nvSpPr>
         <p:spPr>
           <a:xfrm>
-            <a:off x="411480" y="4206240"/>
+            <a:off x="411480" y="4663440"/>
             <a:ext cx="1828800" cy="365760"/>
           </a:xfrm>
           <a:prstGeom prst="rect">
@@ -8617,8 +8617,8 @@
         </p:nvSpPr>
         <p:spPr>
           <a:xfrm>
-            <a:off x="7318717" y="4270248"/>
-            <a:ext cx="365760" cy="182880"/>
+            <a:off x="7325751" y="4727448"/>
+            <a:ext cx="358726" cy="182880"/>
           </a:xfrm>
           <a:prstGeom prst="rect">
             <a:avLst/>
@@ -8639,7 +8639,7 @@
         </p:nvSpPr>
         <p:spPr>
           <a:xfrm>
-            <a:off x="6801729" y="4471416"/>
+            <a:off x="6801729" y="4928616"/>
             <a:ext cx="1005840" cy="164592"/>
           </a:xfrm>
           <a:prstGeom prst="rect">
@@ -8673,7 +8673,7 @@
                 <a:latin typeface="Arial"/>
                 <a:cs typeface="Arial"/>
               </a:rPr>
-              <a:t>2024 ⚠</a:t>
+              <a:t>Feb 2024</a:t>
             </a:r>
           </a:p>
         </p:txBody>
@@ -8686,7 +8686,7 @@
         </p:nvSpPr>
         <p:spPr>
           <a:xfrm>
-            <a:off x="4575517" y="4059936"/>
+            <a:off x="4575517" y="4517136"/>
             <a:ext cx="3108960" cy="182880"/>
           </a:xfrm>
           <a:prstGeom prst="rect">
@@ -8720,78 +8720,32 @@
                 <a:latin typeface="Arial"/>
                 <a:cs typeface="Arial"/>
               </a:rPr>
-              <a:t>seed for ≥ 1 500 manzanas in 2024 ⚠</a:t>
-            </a:r>
-          </a:p>
-        </p:txBody>
-      </p:sp>
-      <p:sp>
-        <p:nvSpPr>
-          <p:cNvPr id="43" name="TextBox 43"/>
-          <p:cNvSpPr txBox="1"/>
-          <p:nvPr/>
-        </p:nvSpPr>
-        <p:spPr>
-          <a:xfrm>
-            <a:off x="411480" y="4846320"/>
-            <a:ext cx="1828800" cy="365760"/>
-          </a:xfrm>
-          <a:prstGeom prst="rect">
-            <a:avLst/>
-          </a:prstGeom>
-          <a:noFill/>
-          <a:ln>
-            <a:noFill/>
-          </a:ln>
-        </p:spPr>
-        <p:txBody>
-          <a:bodyPr wrap="square" lIns="0" tIns="0" rIns="0" bIns="0" anchor="t" rtlCol="0">
-            <a:noAutofit/>
-          </a:bodyPr>
-          <a:lstStyle/>
-          <a:p>
-            <a:pPr algn="l" marL="0" indent="0">
-              <a:spcBef>
-                <a:spcPts val="0"/>
-              </a:spcBef>
-              <a:spcAft>
-                <a:spcPts val="0"/>
-              </a:spcAft>
-              <a:buNone/>
-            </a:pPr>
-            <a:r>
-              <a:rPr lang="en-GB" sz="850" b="1" dirty="0">
-                <a:solidFill>
-                  <a:srgbClr val="262626"/>
-                </a:solidFill>
-                <a:latin typeface="Arial"/>
-                <a:cs typeface="Arial"/>
-              </a:rPr>
-              <a:t>2 more varieties</a:t>
-            </a:r>
-          </a:p>
-          <a:p>
-            <a:pPr algn="l" marL="0" indent="0">
-              <a:spcBef>
-                <a:spcPts val="0"/>
-              </a:spcBef>
-              <a:spcAft>
-                <a:spcPts val="0"/>
-              </a:spcAft>
-              <a:buNone/>
-            </a:pPr>
-            <a:r>
-              <a:rPr lang="en-GB" sz="750" dirty="0">
-                <a:solidFill>
-                  <a:srgbClr val="7F7F7F"/>
-                </a:solidFill>
-                <a:latin typeface="Arial"/>
-                <a:cs typeface="Arial"/>
-              </a:rPr>
-              <a:t>in release process</a:t>
-            </a:r>
-          </a:p>
-        </p:txBody>
+              <a:t>seed for ≥ 1 500 manzanas in 2024</a:t>
+            </a:r>
+          </a:p>
+        </p:txBody>
+      </p:sp>
+      <p:sp>
+        <p:nvSpPr>
+          <p:cNvPr id="43" name="Shape 43"/>
+          <p:cNvSpPr/>
+          <p:nvPr/>
+        </p:nvSpPr>
+        <p:spPr>
+          <a:xfrm>
+            <a:off x="6497304" y="2148840"/>
+            <a:ext cx="10973" cy="3383280"/>
+          </a:xfrm>
+          <a:prstGeom prst="rect">
+            <a:avLst/>
+          </a:prstGeom>
+          <a:solidFill>
+            <a:srgbClr val="8497B0"/>
+          </a:solidFill>
+          <a:ln>
+            <a:noFill/>
+          </a:ln>
+        </p:spPr>
       </p:sp>
       <p:sp>
         <p:nvSpPr>
@@ -8801,14 +8755,14 @@
         </p:nvSpPr>
         <p:spPr>
           <a:xfrm>
-            <a:off x="7614138" y="4910328"/>
-            <a:ext cx="70338" cy="182880"/>
-          </a:xfrm>
-          <a:prstGeom prst="rect">
-            <a:avLst/>
-          </a:prstGeom>
-          <a:solidFill>
-            <a:srgbClr val="BFBFBF"/>
+            <a:off x="6637981" y="2148840"/>
+            <a:ext cx="10973" cy="3383280"/>
+          </a:xfrm>
+          <a:prstGeom prst="rect">
+            <a:avLst/>
+          </a:prstGeom>
+          <a:solidFill>
+            <a:srgbClr val="8497B0"/>
           </a:solidFill>
           <a:ln>
             <a:noFill/>
@@ -8823,8 +8777,8 @@
         </p:nvSpPr>
         <p:spPr>
           <a:xfrm>
-            <a:off x="4575517" y="4700016"/>
-            <a:ext cx="3108960" cy="182880"/>
+            <a:off x="4902591" y="5138928"/>
+            <a:ext cx="1554480" cy="365760"/>
           </a:xfrm>
           <a:prstGeom prst="rect">
             <a:avLst/>
@@ -8850,14 +8804,35 @@
               <a:buNone/>
             </a:pPr>
             <a:r>
-              <a:rPr lang="en-GB" sz="750" dirty="0">
-                <a:solidFill>
-                  <a:srgbClr val="262626"/>
-                </a:solidFill>
-                <a:latin typeface="Arial"/>
-                <a:cs typeface="Arial"/>
-              </a:rPr>
-              <a:t>announced early 2026 ⚠</a:t>
+              <a:rPr lang="en-GB" sz="750" b="1" dirty="0">
+                <a:solidFill>
+                  <a:srgbClr val="1F3864"/>
+                </a:solidFill>
+                <a:latin typeface="Arial"/>
+                <a:cs typeface="Arial"/>
+              </a:rPr>
+              <a:t>Apr 2018: 4 new strains</a:t>
+            </a:r>
+          </a:p>
+          <a:p>
+            <a:pPr algn="r" marL="0" indent="0">
+              <a:spcBef>
+                <a:spcPts val="0"/>
+              </a:spcBef>
+              <a:spcAft>
+                <a:spcPts val="0"/>
+              </a:spcAft>
+              <a:buNone/>
+            </a:pPr>
+            <a:r>
+              <a:rPr lang="en-GB" sz="750" b="1" dirty="0">
+                <a:solidFill>
+                  <a:srgbClr val="1F3864"/>
+                </a:solidFill>
+                <a:latin typeface="Arial"/>
+                <a:cs typeface="Arial"/>
+              </a:rPr>
+              <a:t>Apr 2019: 16 new strains</a:t>
             </a:r>
           </a:p>
         </p:txBody>
@@ -8870,118 +8845,6 @@
         </p:nvSpPr>
         <p:spPr>
           <a:xfrm>
-            <a:off x="6497304" y="2148840"/>
-            <a:ext cx="10973" cy="3383280"/>
-          </a:xfrm>
-          <a:prstGeom prst="rect">
-            <a:avLst/>
-          </a:prstGeom>
-          <a:solidFill>
-            <a:srgbClr val="8497B0"/>
-          </a:solidFill>
-          <a:ln>
-            <a:noFill/>
-          </a:ln>
-        </p:spPr>
-      </p:sp>
-      <p:sp>
-        <p:nvSpPr>
-          <p:cNvPr id="47" name="Shape 47"/>
-          <p:cNvSpPr/>
-          <p:nvPr/>
-        </p:nvSpPr>
-        <p:spPr>
-          <a:xfrm>
-            <a:off x="6637981" y="2148840"/>
-            <a:ext cx="10973" cy="3383280"/>
-          </a:xfrm>
-          <a:prstGeom prst="rect">
-            <a:avLst/>
-          </a:prstGeom>
-          <a:solidFill>
-            <a:srgbClr val="8497B0"/>
-          </a:solidFill>
-          <a:ln>
-            <a:noFill/>
-          </a:ln>
-        </p:spPr>
-      </p:sp>
-      <p:sp>
-        <p:nvSpPr>
-          <p:cNvPr id="48" name="TextBox 48"/>
-          <p:cNvSpPr txBox="1"/>
-          <p:nvPr/>
-        </p:nvSpPr>
-        <p:spPr>
-          <a:xfrm>
-            <a:off x="4902591" y="5138928"/>
-            <a:ext cx="1554480" cy="365760"/>
-          </a:xfrm>
-          <a:prstGeom prst="rect">
-            <a:avLst/>
-          </a:prstGeom>
-          <a:noFill/>
-          <a:ln>
-            <a:noFill/>
-          </a:ln>
-        </p:spPr>
-        <p:txBody>
-          <a:bodyPr wrap="square" lIns="0" tIns="0" rIns="0" bIns="0" anchor="t" rtlCol="0">
-            <a:noAutofit/>
-          </a:bodyPr>
-          <a:lstStyle/>
-          <a:p>
-            <a:pPr algn="r" marL="0" indent="0">
-              <a:spcBef>
-                <a:spcPts val="0"/>
-              </a:spcBef>
-              <a:spcAft>
-                <a:spcPts val="0"/>
-              </a:spcAft>
-              <a:buNone/>
-            </a:pPr>
-            <a:r>
-              <a:rPr lang="en-GB" sz="750" b="1" dirty="0">
-                <a:solidFill>
-                  <a:srgbClr val="1F3864"/>
-                </a:solidFill>
-                <a:latin typeface="Arial"/>
-                <a:cs typeface="Arial"/>
-              </a:rPr>
-              <a:t>Apr 2018: 4 new strains</a:t>
-            </a:r>
-          </a:p>
-          <a:p>
-            <a:pPr algn="r" marL="0" indent="0">
-              <a:spcBef>
-                <a:spcPts val="0"/>
-              </a:spcBef>
-              <a:spcAft>
-                <a:spcPts val="0"/>
-              </a:spcAft>
-              <a:buNone/>
-            </a:pPr>
-            <a:r>
-              <a:rPr lang="en-GB" sz="750" b="1" dirty="0">
-                <a:solidFill>
-                  <a:srgbClr val="1F3864"/>
-                </a:solidFill>
-                <a:latin typeface="Arial"/>
-                <a:cs typeface="Arial"/>
-              </a:rPr>
-              <a:t>Apr 2019: 16 new strains</a:t>
-            </a:r>
-          </a:p>
-        </p:txBody>
-      </p:sp>
-      <p:sp>
-        <p:nvSpPr>
-          <p:cNvPr id="49" name="Shape 49"/>
-          <p:cNvSpPr/>
-          <p:nvPr/>
-        </p:nvSpPr>
-        <p:spPr>
-          <a:xfrm>
             <a:off x="640080" y="5833872"/>
             <a:ext cx="164592" cy="128016"/>
           </a:xfrm>
@@ -8998,7 +8861,7 @@
       </p:sp>
       <p:sp>
         <p:nvSpPr>
-          <p:cNvPr id="50" name="TextBox 50"/>
+          <p:cNvPr id="47" name="TextBox 47"/>
           <p:cNvSpPr txBox="1"/>
           <p:nvPr/>
         </p:nvSpPr>
@@ -9045,7 +8908,7 @@
       </p:sp>
       <p:sp>
         <p:nvSpPr>
-          <p:cNvPr id="51" name="Shape 51"/>
+          <p:cNvPr id="48" name="Shape 48"/>
           <p:cNvSpPr/>
           <p:nvPr/>
         </p:nvSpPr>
@@ -9067,7 +8930,7 @@
       </p:sp>
       <p:sp>
         <p:nvSpPr>
-          <p:cNvPr id="52" name="TextBox 52"/>
+          <p:cNvPr id="49" name="TextBox 49"/>
           <p:cNvSpPr txBox="1"/>
           <p:nvPr/>
         </p:nvSpPr>
@@ -9107,20 +8970,20 @@
                 <a:latin typeface="Arial"/>
                 <a:cs typeface="Arial"/>
               </a:rPr>
-              <a:t>weakening / partial</a:t>
-            </a:r>
-          </a:p>
-        </p:txBody>
-      </p:sp>
-      <p:sp>
-        <p:nvSpPr>
-          <p:cNvPr id="53" name="Shape 53"/>
+              <a:t>tolerant / partly susceptible</a:t>
+            </a:r>
+          </a:p>
+        </p:txBody>
+      </p:sp>
+      <p:sp>
+        <p:nvSpPr>
+          <p:cNvPr id="50" name="Shape 50"/>
           <p:cNvSpPr/>
           <p:nvPr/>
         </p:nvSpPr>
         <p:spPr>
           <a:xfrm>
-            <a:off x="2855854" y="5833872"/>
+            <a:off x="3353288" y="5833872"/>
             <a:ext cx="164592" cy="128016"/>
           </a:xfrm>
           <a:prstGeom prst="rect">
@@ -9136,25 +8999,143 @@
       </p:sp>
       <p:sp>
         <p:nvSpPr>
+          <p:cNvPr id="51" name="TextBox 51"/>
+          <p:cNvSpPr txBox="1"/>
+          <p:nvPr/>
+        </p:nvSpPr>
+        <p:spPr>
+          <a:xfrm>
+            <a:off x="3636752" y="5797296"/>
+            <a:ext cx="2926080" cy="201168"/>
+          </a:xfrm>
+          <a:prstGeom prst="rect">
+            <a:avLst/>
+          </a:prstGeom>
+          <a:noFill/>
+          <a:ln>
+            <a:noFill/>
+          </a:ln>
+        </p:spPr>
+        <p:txBody>
+          <a:bodyPr wrap="square" lIns="0" tIns="0" rIns="0" bIns="0" anchor="t" rtlCol="0">
+            <a:noAutofit/>
+          </a:bodyPr>
+          <a:lstStyle/>
+          <a:p>
+            <a:pPr algn="l" marL="0" indent="0">
+              <a:spcBef>
+                <a:spcPts val="0"/>
+              </a:spcBef>
+              <a:spcAft>
+                <a:spcPts val="0"/>
+              </a:spcAft>
+              <a:buNone/>
+            </a:pPr>
+            <a:r>
+              <a:rPr lang="en-GB" sz="800" dirty="0">
+                <a:solidFill>
+                  <a:srgbClr val="262626"/>
+                </a:solidFill>
+                <a:latin typeface="Arial"/>
+                <a:cs typeface="Arial"/>
+              </a:rPr>
+              <a:t>susceptible</a:t>
+            </a:r>
+          </a:p>
+        </p:txBody>
+      </p:sp>
+      <p:sp>
+        <p:nvSpPr>
+          <p:cNvPr id="52" name="Shape 52"/>
+          <p:cNvSpPr/>
+          <p:nvPr/>
+        </p:nvSpPr>
+        <p:spPr>
+          <a:xfrm>
+            <a:off x="4311945" y="5833872"/>
+            <a:ext cx="164592" cy="128016"/>
+          </a:xfrm>
+          <a:prstGeom prst="rect">
+            <a:avLst/>
+          </a:prstGeom>
+          <a:solidFill>
+            <a:srgbClr val="A9D18E"/>
+          </a:solidFill>
+          <a:ln>
+            <a:noFill/>
+          </a:ln>
+        </p:spPr>
+      </p:sp>
+      <p:sp>
+        <p:nvSpPr>
+          <p:cNvPr id="53" name="TextBox 53"/>
+          <p:cNvSpPr txBox="1"/>
+          <p:nvPr/>
+        </p:nvSpPr>
+        <p:spPr>
+          <a:xfrm>
+            <a:off x="4595409" y="5797296"/>
+            <a:ext cx="2926080" cy="201168"/>
+          </a:xfrm>
+          <a:prstGeom prst="rect">
+            <a:avLst/>
+          </a:prstGeom>
+          <a:noFill/>
+          <a:ln>
+            <a:noFill/>
+          </a:ln>
+        </p:spPr>
+        <p:txBody>
+          <a:bodyPr wrap="square" lIns="0" tIns="0" rIns="0" bIns="0" anchor="t" rtlCol="0">
+            <a:noAutofit/>
+          </a:bodyPr>
+          <a:lstStyle/>
+          <a:p>
+            <a:pPr algn="l" marL="0" indent="0">
+              <a:spcBef>
+                <a:spcPts val="0"/>
+              </a:spcBef>
+              <a:spcAft>
+                <a:spcPts val="0"/>
+              </a:spcAft>
+              <a:buNone/>
+            </a:pPr>
+            <a:r>
+              <a:rPr lang="en-GB" sz="800" dirty="0">
+                <a:solidFill>
+                  <a:srgbClr val="262626"/>
+                </a:solidFill>
+                <a:latin typeface="Arial"/>
+                <a:cs typeface="Arial"/>
+              </a:rPr>
+              <a:t>no statement after 2021</a:t>
+            </a:r>
+          </a:p>
+        </p:txBody>
+      </p:sp>
+      <p:sp>
+        <p:nvSpPr>
           <p:cNvPr id="54" name="TextBox 54"/>
           <p:cNvSpPr txBox="1"/>
           <p:nvPr/>
         </p:nvSpPr>
         <p:spPr>
           <a:xfrm>
-            <a:off x="3139318" y="5797296"/>
-            <a:ext cx="2926080" cy="201168"/>
-          </a:xfrm>
-          <a:prstGeom prst="rect">
-            <a:avLst/>
-          </a:prstGeom>
-          <a:noFill/>
-          <a:ln>
-            <a:noFill/>
-          </a:ln>
-        </p:spPr>
-        <p:txBody>
-          <a:bodyPr wrap="square" lIns="0" tIns="0" rIns="0" bIns="0" anchor="t" rtlCol="0">
+            <a:off x="8001000" y="1874520"/>
+            <a:ext cx="731520" cy="292608"/>
+          </a:xfrm>
+          <a:prstGeom prst="rect">
+            <a:avLst/>
+          </a:prstGeom>
+          <a:solidFill>
+            <a:srgbClr val="1F3864"/>
+          </a:solidFill>
+          <a:ln>
+            <a:noFill/>
+          </a:ln>
+        </p:spPr>
+        <p:txBody>
+          <a:bodyPr wrap="square" lIns="36576" tIns="27432" rIns="36576" bIns="27432" anchor="ctr" rtlCol="0">
             <a:noAutofit/>
           </a:bodyPr>
           <a:lstStyle/>
@@ -9169,257 +9150,70 @@
               <a:buNone/>
             </a:pPr>
             <a:r>
-              <a:rPr lang="en-GB" sz="800" dirty="0">
-                <a:solidFill>
-                  <a:srgbClr val="262626"/>
-                </a:solidFill>
-                <a:latin typeface="Arial"/>
-                <a:cs typeface="Arial"/>
-              </a:rPr>
-              <a:t>broken</a:t>
-            </a:r>
-          </a:p>
-        </p:txBody>
-      </p:sp>
-      <p:sp>
-        <p:nvSpPr>
-          <p:cNvPr id="55" name="Shape 55"/>
-          <p:cNvSpPr/>
-          <p:nvPr/>
-        </p:nvSpPr>
-        <p:spPr>
-          <a:xfrm>
-            <a:off x="3565794" y="5833872"/>
-            <a:ext cx="164592" cy="128016"/>
-          </a:xfrm>
-          <a:prstGeom prst="rect">
-            <a:avLst/>
-          </a:prstGeom>
-          <a:solidFill>
-            <a:srgbClr val="A9D18E"/>
-          </a:solidFill>
-          <a:ln>
-            <a:noFill/>
-          </a:ln>
-        </p:spPr>
+              <a:rPr lang="en-GB" sz="750" b="1" dirty="0">
+                <a:solidFill>
+                  <a:srgbClr val="FFFFFF"/>
+                </a:solidFill>
+                <a:latin typeface="Arial"/>
+                <a:cs typeface="Arial"/>
+              </a:rPr>
+              <a:t>When</a:t>
+            </a:r>
+          </a:p>
+        </p:txBody>
+      </p:sp>
+      <p:sp>
+        <p:nvSpPr>
+          <p:cNvPr id="55" name="TextBox 55"/>
+          <p:cNvSpPr txBox="1"/>
+          <p:nvPr/>
+        </p:nvSpPr>
+        <p:spPr>
+          <a:xfrm>
+            <a:off x="8732520" y="1874520"/>
+            <a:ext cx="2057400" cy="292608"/>
+          </a:xfrm>
+          <a:prstGeom prst="rect">
+            <a:avLst/>
+          </a:prstGeom>
+          <a:solidFill>
+            <a:srgbClr val="1F3864"/>
+          </a:solidFill>
+          <a:ln>
+            <a:noFill/>
+          </a:ln>
+        </p:spPr>
+        <p:txBody>
+          <a:bodyPr wrap="square" lIns="36576" tIns="27432" rIns="36576" bIns="27432" anchor="ctr" rtlCol="0">
+            <a:noAutofit/>
+          </a:bodyPr>
+          <a:lstStyle/>
+          <a:p>
+            <a:pPr algn="ctr" marL="0" indent="0">
+              <a:spcBef>
+                <a:spcPts val="0"/>
+              </a:spcBef>
+              <a:spcAft>
+                <a:spcPts val="0"/>
+              </a:spcAft>
+              <a:buNone/>
+            </a:pPr>
+            <a:r>
+              <a:rPr lang="en-GB" sz="750" b="1" dirty="0">
+                <a:solidFill>
+                  <a:srgbClr val="FFFFFF"/>
+                </a:solidFill>
+                <a:latin typeface="Arial"/>
+                <a:cs typeface="Arial"/>
+              </a:rPr>
+              <a:t>Share with resistant varieties</a:t>
+            </a:r>
+          </a:p>
+        </p:txBody>
       </p:sp>
       <p:sp>
         <p:nvSpPr>
           <p:cNvPr id="56" name="TextBox 56"/>
-          <p:cNvSpPr txBox="1"/>
-          <p:nvPr/>
-        </p:nvSpPr>
-        <p:spPr>
-          <a:xfrm>
-            <a:off x="3849258" y="5797296"/>
-            <a:ext cx="2926080" cy="201168"/>
-          </a:xfrm>
-          <a:prstGeom prst="rect">
-            <a:avLst/>
-          </a:prstGeom>
-          <a:noFill/>
-          <a:ln>
-            <a:noFill/>
-          </a:ln>
-        </p:spPr>
-        <p:txBody>
-          <a:bodyPr wrap="square" lIns="0" tIns="0" rIns="0" bIns="0" anchor="t" rtlCol="0">
-            <a:noAutofit/>
-          </a:bodyPr>
-          <a:lstStyle/>
-          <a:p>
-            <a:pPr algn="l" marL="0" indent="0">
-              <a:spcBef>
-                <a:spcPts val="0"/>
-              </a:spcBef>
-              <a:spcAft>
-                <a:spcPts val="0"/>
-              </a:spcAft>
-              <a:buNone/>
-            </a:pPr>
-            <a:r>
-              <a:rPr lang="en-GB" sz="800" dirty="0">
-                <a:solidFill>
-                  <a:srgbClr val="262626"/>
-                </a:solidFill>
-                <a:latin typeface="Arial"/>
-                <a:cs typeface="Arial"/>
-              </a:rPr>
-              <a:t>not re-confirmed</a:t>
-            </a:r>
-          </a:p>
-        </p:txBody>
-      </p:sp>
-      <p:sp>
-        <p:nvSpPr>
-          <p:cNvPr id="57" name="Shape 57"/>
-          <p:cNvSpPr/>
-          <p:nvPr/>
-        </p:nvSpPr>
-        <p:spPr>
-          <a:xfrm>
-            <a:off x="4773168" y="5833872"/>
-            <a:ext cx="164592" cy="128016"/>
-          </a:xfrm>
-          <a:prstGeom prst="rect">
-            <a:avLst/>
-          </a:prstGeom>
-          <a:solidFill>
-            <a:srgbClr val="BFBFBF"/>
-          </a:solidFill>
-          <a:ln>
-            <a:noFill/>
-          </a:ln>
-        </p:spPr>
-      </p:sp>
-      <p:sp>
-        <p:nvSpPr>
-          <p:cNvPr id="58" name="TextBox 58"/>
-          <p:cNvSpPr txBox="1"/>
-          <p:nvPr/>
-        </p:nvSpPr>
-        <p:spPr>
-          <a:xfrm>
-            <a:off x="5056632" y="5797296"/>
-            <a:ext cx="2926080" cy="201168"/>
-          </a:xfrm>
-          <a:prstGeom prst="rect">
-            <a:avLst/>
-          </a:prstGeom>
-          <a:noFill/>
-          <a:ln>
-            <a:noFill/>
-          </a:ln>
-        </p:spPr>
-        <p:txBody>
-          <a:bodyPr wrap="square" lIns="0" tIns="0" rIns="0" bIns="0" anchor="t" rtlCol="0">
-            <a:noAutofit/>
-          </a:bodyPr>
-          <a:lstStyle/>
-          <a:p>
-            <a:pPr algn="l" marL="0" indent="0">
-              <a:spcBef>
-                <a:spcPts val="0"/>
-              </a:spcBef>
-              <a:spcAft>
-                <a:spcPts val="0"/>
-              </a:spcAft>
-              <a:buNone/>
-            </a:pPr>
-            <a:r>
-              <a:rPr lang="en-GB" sz="800" dirty="0">
-                <a:solidFill>
-                  <a:srgbClr val="262626"/>
-                </a:solidFill>
-                <a:latin typeface="Arial"/>
-                <a:cs typeface="Arial"/>
-              </a:rPr>
-              <a:t>pending</a:t>
-            </a:r>
-          </a:p>
-        </p:txBody>
-      </p:sp>
-      <p:sp>
-        <p:nvSpPr>
-          <p:cNvPr id="59" name="TextBox 59"/>
-          <p:cNvSpPr txBox="1"/>
-          <p:nvPr/>
-        </p:nvSpPr>
-        <p:spPr>
-          <a:xfrm>
-            <a:off x="8001000" y="1874520"/>
-            <a:ext cx="685800" cy="292608"/>
-          </a:xfrm>
-          <a:prstGeom prst="rect">
-            <a:avLst/>
-          </a:prstGeom>
-          <a:solidFill>
-            <a:srgbClr val="1F3864"/>
-          </a:solidFill>
-          <a:ln>
-            <a:noFill/>
-          </a:ln>
-        </p:spPr>
-        <p:txBody>
-          <a:bodyPr wrap="square" lIns="36576" tIns="27432" rIns="36576" bIns="27432" anchor="ctr" rtlCol="0">
-            <a:noAutofit/>
-          </a:bodyPr>
-          <a:lstStyle/>
-          <a:p>
-            <a:pPr algn="l" marL="0" indent="0">
-              <a:spcBef>
-                <a:spcPts val="0"/>
-              </a:spcBef>
-              <a:spcAft>
-                <a:spcPts val="0"/>
-              </a:spcAft>
-              <a:buNone/>
-            </a:pPr>
-            <a:r>
-              <a:rPr lang="en-GB" sz="750" b="1" dirty="0">
-                <a:solidFill>
-                  <a:srgbClr val="FFFFFF"/>
-                </a:solidFill>
-                <a:latin typeface="Arial"/>
-                <a:cs typeface="Arial"/>
-              </a:rPr>
-              <a:t>When</a:t>
-            </a:r>
-          </a:p>
-        </p:txBody>
-      </p:sp>
-      <p:sp>
-        <p:nvSpPr>
-          <p:cNvPr id="60" name="TextBox 60"/>
-          <p:cNvSpPr txBox="1"/>
-          <p:nvPr/>
-        </p:nvSpPr>
-        <p:spPr>
-          <a:xfrm>
-            <a:off x="8686800" y="1874520"/>
-            <a:ext cx="2103120" cy="292608"/>
-          </a:xfrm>
-          <a:prstGeom prst="rect">
-            <a:avLst/>
-          </a:prstGeom>
-          <a:solidFill>
-            <a:srgbClr val="1F3864"/>
-          </a:solidFill>
-          <a:ln>
-            <a:noFill/>
-          </a:ln>
-        </p:spPr>
-        <p:txBody>
-          <a:bodyPr wrap="square" lIns="36576" tIns="27432" rIns="36576" bIns="27432" anchor="ctr" rtlCol="0">
-            <a:noAutofit/>
-          </a:bodyPr>
-          <a:lstStyle/>
-          <a:p>
-            <a:pPr algn="ctr" marL="0" indent="0">
-              <a:spcBef>
-                <a:spcPts val="0"/>
-              </a:spcBef>
-              <a:spcAft>
-                <a:spcPts val="0"/>
-              </a:spcAft>
-              <a:buNone/>
-            </a:pPr>
-            <a:r>
-              <a:rPr lang="en-GB" sz="750" b="1" dirty="0">
-                <a:solidFill>
-                  <a:srgbClr val="FFFFFF"/>
-                </a:solidFill>
-                <a:latin typeface="Arial"/>
-                <a:cs typeface="Arial"/>
-              </a:rPr>
-              <a:t>Share with resistant varieties</a:t>
-            </a:r>
-          </a:p>
-        </p:txBody>
-      </p:sp>
-      <p:sp>
-        <p:nvSpPr>
-          <p:cNvPr id="61" name="TextBox 61"/>
           <p:cNvSpPr txBox="1"/>
           <p:nvPr/>
         </p:nvSpPr>
@@ -9468,14 +9262,14 @@
       </p:sp>
       <p:sp>
         <p:nvSpPr>
-          <p:cNvPr id="62" name="TextBox 62"/>
+          <p:cNvPr id="57" name="TextBox 57"/>
           <p:cNvSpPr txBox="1"/>
           <p:nvPr/>
         </p:nvSpPr>
         <p:spPr>
           <a:xfrm>
             <a:off x="8001000" y="2167128"/>
-            <a:ext cx="685800" cy="365760"/>
+            <a:ext cx="731520" cy="365760"/>
           </a:xfrm>
           <a:prstGeom prst="rect">
             <a:avLst/>
@@ -9517,14 +9311,14 @@
       </p:sp>
       <p:sp>
         <p:nvSpPr>
-          <p:cNvPr id="63" name="TextBox 63"/>
-          <p:cNvSpPr txBox="1"/>
-          <p:nvPr/>
-        </p:nvSpPr>
-        <p:spPr>
-          <a:xfrm>
-            <a:off x="8686800" y="2167128"/>
-            <a:ext cx="2103120" cy="365760"/>
+          <p:cNvPr id="58" name="TextBox 58"/>
+          <p:cNvSpPr txBox="1"/>
+          <p:nvPr/>
+        </p:nvSpPr>
+        <p:spPr>
+          <a:xfrm>
+            <a:off x="8732520" y="2167128"/>
+            <a:ext cx="2057400" cy="365760"/>
           </a:xfrm>
           <a:prstGeom prst="rect">
             <a:avLst/>
@@ -9566,7 +9360,7 @@
       </p:sp>
       <p:sp>
         <p:nvSpPr>
-          <p:cNvPr id="64" name="TextBox 64"/>
+          <p:cNvPr id="59" name="TextBox 59"/>
           <p:cNvSpPr txBox="1"/>
           <p:nvPr/>
         </p:nvSpPr>
@@ -9615,14 +9409,14 @@
       </p:sp>
       <p:sp>
         <p:nvSpPr>
-          <p:cNvPr id="65" name="TextBox 65"/>
+          <p:cNvPr id="60" name="TextBox 60"/>
           <p:cNvSpPr txBox="1"/>
           <p:nvPr/>
         </p:nvSpPr>
         <p:spPr>
           <a:xfrm>
             <a:off x="8001000" y="2532888"/>
-            <a:ext cx="685800" cy="365760"/>
+            <a:ext cx="731520" cy="365760"/>
           </a:xfrm>
           <a:prstGeom prst="rect">
             <a:avLst/>
@@ -9657,21 +9451,21 @@
                 <a:latin typeface="Arial"/>
                 <a:cs typeface="Arial"/>
               </a:rPr>
-              <a:t>2013</a:t>
-            </a:r>
-          </a:p>
-        </p:txBody>
-      </p:sp>
-      <p:sp>
-        <p:nvSpPr>
-          <p:cNvPr id="66" name="TextBox 66"/>
-          <p:cNvSpPr txBox="1"/>
-          <p:nvPr/>
-        </p:nvSpPr>
-        <p:spPr>
-          <a:xfrm>
-            <a:off x="8686800" y="2532888"/>
-            <a:ext cx="2103120" cy="365760"/>
+              <a:t>since 2012</a:t>
+            </a:r>
+          </a:p>
+        </p:txBody>
+      </p:sp>
+      <p:sp>
+        <p:nvSpPr>
+          <p:cNvPr id="61" name="TextBox 61"/>
+          <p:cNvSpPr txBox="1"/>
+          <p:nvPr/>
+        </p:nvSpPr>
+        <p:spPr>
+          <a:xfrm>
+            <a:off x="8732520" y="2532888"/>
+            <a:ext cx="2057400" cy="365760"/>
           </a:xfrm>
           <a:prstGeom prst="rect">
             <a:avLst/>
@@ -9706,14 +9500,14 @@
                 <a:latin typeface="Arial"/>
                 <a:cs typeface="Arial"/>
               </a:rPr>
-              <a:t>50 % (200 000 of 400 000 manzanas)</a:t>
-            </a:r>
-          </a:p>
-        </p:txBody>
-      </p:sp>
-      <p:sp>
-        <p:nvSpPr>
-          <p:cNvPr id="67" name="TextBox 67"/>
+              <a:t>65 % of the area, mostly Lempira</a:t>
+            </a:r>
+          </a:p>
+        </p:txBody>
+      </p:sp>
+      <p:sp>
+        <p:nvSpPr>
+          <p:cNvPr id="62" name="TextBox 62"/>
           <p:cNvSpPr txBox="1"/>
           <p:nvPr/>
         </p:nvSpPr>
@@ -9755,21 +9549,21 @@
                 <a:latin typeface="Arial"/>
                 <a:cs typeface="Arial"/>
               </a:rPr>
-              <a:t>⚠ El Heraldo 2013</a:t>
-            </a:r>
-          </a:p>
-        </p:txBody>
-      </p:sp>
-      <p:sp>
-        <p:nvSpPr>
-          <p:cNvPr id="68" name="TextBox 68"/>
+              <a:t>✔ Morales &amp; Grajeda</a:t>
+            </a:r>
+          </a:p>
+        </p:txBody>
+      </p:sp>
+      <p:sp>
+        <p:nvSpPr>
+          <p:cNvPr id="63" name="TextBox 63"/>
           <p:cNvSpPr txBox="1"/>
           <p:nvPr/>
         </p:nvSpPr>
         <p:spPr>
           <a:xfrm>
             <a:off x="8001000" y="2898648"/>
-            <a:ext cx="685800" cy="365760"/>
+            <a:ext cx="731520" cy="365760"/>
           </a:xfrm>
           <a:prstGeom prst="rect">
             <a:avLst/>
@@ -9811,14 +9605,14 @@
       </p:sp>
       <p:sp>
         <p:nvSpPr>
-          <p:cNvPr id="69" name="TextBox 69"/>
-          <p:cNvSpPr txBox="1"/>
-          <p:nvPr/>
-        </p:nvSpPr>
-        <p:spPr>
-          <a:xfrm>
-            <a:off x="8686800" y="2898648"/>
-            <a:ext cx="2103120" cy="365760"/>
+          <p:cNvPr id="64" name="TextBox 64"/>
+          <p:cNvSpPr txBox="1"/>
+          <p:nvPr/>
+        </p:nvSpPr>
+        <p:spPr>
+          <a:xfrm>
+            <a:off x="8732520" y="2898648"/>
+            <a:ext cx="2057400" cy="365760"/>
           </a:xfrm>
           <a:prstGeom prst="rect">
             <a:avLst/>
@@ -9860,7 +9654,7 @@
       </p:sp>
       <p:sp>
         <p:nvSpPr>
-          <p:cNvPr id="70" name="TextBox 70"/>
+          <p:cNvPr id="65" name="TextBox 65"/>
           <p:cNvSpPr txBox="1"/>
           <p:nvPr/>
         </p:nvSpPr>
@@ -9909,14 +9703,14 @@
       </p:sp>
       <p:sp>
         <p:nvSpPr>
-          <p:cNvPr id="71" name="TextBox 71"/>
+          <p:cNvPr id="66" name="TextBox 66"/>
           <p:cNvSpPr txBox="1"/>
           <p:nvPr/>
         </p:nvSpPr>
         <p:spPr>
           <a:xfrm>
             <a:off x="8001000" y="3264408"/>
-            <a:ext cx="685800" cy="365760"/>
+            <a:ext cx="731520" cy="365760"/>
           </a:xfrm>
           <a:prstGeom prst="rect">
             <a:avLst/>
@@ -9958,14 +9752,14 @@
       </p:sp>
       <p:sp>
         <p:nvSpPr>
-          <p:cNvPr id="72" name="TextBox 72"/>
-          <p:cNvSpPr txBox="1"/>
-          <p:nvPr/>
-        </p:nvSpPr>
-        <p:spPr>
-          <a:xfrm>
-            <a:off x="8686800" y="3264408"/>
-            <a:ext cx="2103120" cy="365760"/>
+          <p:cNvPr id="67" name="TextBox 67"/>
+          <p:cNvSpPr txBox="1"/>
+          <p:nvPr/>
+        </p:nvSpPr>
+        <p:spPr>
+          <a:xfrm>
+            <a:off x="8732520" y="3264408"/>
+            <a:ext cx="2057400" cy="365760"/>
           </a:xfrm>
           <a:prstGeom prst="rect">
             <a:avLst/>
@@ -10007,7 +9801,7 @@
       </p:sp>
       <p:sp>
         <p:nvSpPr>
-          <p:cNvPr id="73" name="TextBox 73"/>
+          <p:cNvPr id="68" name="TextBox 68"/>
           <p:cNvSpPr txBox="1"/>
           <p:nvPr/>
         </p:nvSpPr>
@@ -10056,14 +9850,14 @@
       </p:sp>
       <p:sp>
         <p:nvSpPr>
-          <p:cNvPr id="74" name="TextBox 74"/>
+          <p:cNvPr id="69" name="TextBox 69"/>
           <p:cNvSpPr txBox="1"/>
           <p:nvPr/>
         </p:nvSpPr>
         <p:spPr>
           <a:xfrm>
             <a:off x="8001000" y="3630168"/>
-            <a:ext cx="685800" cy="365760"/>
+            <a:ext cx="731520" cy="365760"/>
           </a:xfrm>
           <a:prstGeom prst="rect">
             <a:avLst/>
@@ -10105,14 +9899,14 @@
       </p:sp>
       <p:sp>
         <p:nvSpPr>
-          <p:cNvPr id="75" name="TextBox 75"/>
-          <p:cNvSpPr txBox="1"/>
-          <p:nvPr/>
-        </p:nvSpPr>
-        <p:spPr>
-          <a:xfrm>
-            <a:off x="8686800" y="3630168"/>
-            <a:ext cx="2103120" cy="365760"/>
+          <p:cNvPr id="70" name="TextBox 70"/>
+          <p:cNvSpPr txBox="1"/>
+          <p:nvPr/>
+        </p:nvSpPr>
+        <p:spPr>
+          <a:xfrm>
+            <a:off x="8732520" y="3630168"/>
+            <a:ext cx="2057400" cy="365760"/>
           </a:xfrm>
           <a:prstGeom prst="rect">
             <a:avLst/>
@@ -10154,7 +9948,7 @@
       </p:sp>
       <p:sp>
         <p:nvSpPr>
-          <p:cNvPr id="76" name="TextBox 76"/>
+          <p:cNvPr id="71" name="TextBox 71"/>
           <p:cNvSpPr txBox="1"/>
           <p:nvPr/>
         </p:nvSpPr>
@@ -10203,14 +9997,14 @@
       </p:sp>
       <p:sp>
         <p:nvSpPr>
-          <p:cNvPr id="77" name="TextBox 77"/>
+          <p:cNvPr id="72" name="TextBox 72"/>
           <p:cNvSpPr txBox="1"/>
           <p:nvPr/>
         </p:nvSpPr>
         <p:spPr>
           <a:xfrm>
             <a:off x="8001000" y="3995928"/>
-            <a:ext cx="685800" cy="365760"/>
+            <a:ext cx="731520" cy="365760"/>
           </a:xfrm>
           <a:prstGeom prst="rect">
             <a:avLst/>
@@ -10252,14 +10046,14 @@
       </p:sp>
       <p:sp>
         <p:nvSpPr>
-          <p:cNvPr id="78" name="TextBox 78"/>
-          <p:cNvSpPr txBox="1"/>
-          <p:nvPr/>
-        </p:nvSpPr>
-        <p:spPr>
-          <a:xfrm>
-            <a:off x="8686800" y="3995928"/>
-            <a:ext cx="2103120" cy="365760"/>
+          <p:cNvPr id="73" name="TextBox 73"/>
+          <p:cNvSpPr txBox="1"/>
+          <p:nvPr/>
+        </p:nvSpPr>
+        <p:spPr>
+          <a:xfrm>
+            <a:off x="8732520" y="3995928"/>
+            <a:ext cx="2057400" cy="365760"/>
           </a:xfrm>
           <a:prstGeom prst="rect">
             <a:avLst/>
@@ -10301,7 +10095,7 @@
       </p:sp>
       <p:sp>
         <p:nvSpPr>
-          <p:cNvPr id="79" name="TextBox 79"/>
+          <p:cNvPr id="74" name="TextBox 74"/>
           <p:cNvSpPr txBox="1"/>
           <p:nvPr/>
         </p:nvSpPr>
@@ -10350,14 +10144,14 @@
       </p:sp>
       <p:sp>
         <p:nvSpPr>
-          <p:cNvPr id="80" name="TextBox 80"/>
+          <p:cNvPr id="75" name="TextBox 75"/>
           <p:cNvSpPr txBox="1"/>
           <p:nvPr/>
         </p:nvSpPr>
         <p:spPr>
           <a:xfrm>
             <a:off x="8001000" y="4361688"/>
-            <a:ext cx="685800" cy="365760"/>
+            <a:ext cx="731520" cy="365760"/>
           </a:xfrm>
           <a:prstGeom prst="rect">
             <a:avLst/>
@@ -10399,14 +10193,14 @@
       </p:sp>
       <p:sp>
         <p:nvSpPr>
-          <p:cNvPr id="81" name="TextBox 81"/>
-          <p:cNvSpPr txBox="1"/>
-          <p:nvPr/>
-        </p:nvSpPr>
-        <p:spPr>
-          <a:xfrm>
-            <a:off x="8686800" y="4361688"/>
-            <a:ext cx="2103120" cy="365760"/>
+          <p:cNvPr id="76" name="TextBox 76"/>
+          <p:cNvSpPr txBox="1"/>
+          <p:nvPr/>
+        </p:nvSpPr>
+        <p:spPr>
+          <a:xfrm>
+            <a:off x="8732520" y="4361688"/>
+            <a:ext cx="2057400" cy="365760"/>
           </a:xfrm>
           <a:prstGeom prst="rect">
             <a:avLst/>
@@ -10448,7 +10242,7 @@
       </p:sp>
       <p:sp>
         <p:nvSpPr>
-          <p:cNvPr id="82" name="TextBox 82"/>
+          <p:cNvPr id="77" name="TextBox 77"/>
           <p:cNvSpPr txBox="1"/>
           <p:nvPr/>
         </p:nvSpPr>
@@ -10497,14 +10291,14 @@
       </p:sp>
       <p:sp>
         <p:nvSpPr>
-          <p:cNvPr id="83" name="TextBox 83"/>
+          <p:cNvPr id="78" name="TextBox 78"/>
           <p:cNvSpPr txBox="1"/>
           <p:nvPr/>
         </p:nvSpPr>
         <p:spPr>
           <a:xfrm>
             <a:off x="8001000" y="4800600"/>
-            <a:ext cx="3977640" cy="1097280"/>
+            <a:ext cx="3977640" cy="1005840"/>
           </a:xfrm>
           <a:prstGeom prst="rect">
             <a:avLst/>
@@ -10537,7 +10331,7 @@
                 <a:latin typeface="Arial"/>
                 <a:cs typeface="Arial"/>
               </a:rPr>
-              <a:t>Count of IHCAFE releases</a:t>
+              <a:t>Count of releases</a:t>
             </a:r>
           </a:p>
           <a:p>
@@ -10558,7 +10352,7 @@
                 <a:latin typeface="Arial"/>
                 <a:cs typeface="Arial"/>
               </a:rPr>
-              <a:t>1990–2004: 3 bred by IHCAFE (IHCAFE 90, Lempira, Parainema)</a:t>
+              <a:t>Bred by IHCAFE: 1990, 1998, 2004 · none 2005–2023</a:t>
             </a:r>
           </a:p>
           <a:p>
@@ -10579,7 +10373,7 @@
                 <a:latin typeface="Arial"/>
                 <a:cs typeface="Arial"/>
               </a:rPr>
-              <a:t>2005–2023: none found</a:t>
+              <a:t>Sep 2023: "at least 4" announced → Feb 2024: 3 presented (bred abroad)</a:t>
             </a:r>
           </a:p>
           <a:p>
@@ -10593,42 +10387,21 @@
               <a:buNone/>
             </a:pPr>
             <a:r>
-              <a:rPr lang="en-GB" sz="800" dirty="0">
-                <a:solidFill>
-                  <a:srgbClr val="262626"/>
-                </a:solidFill>
-                <a:latin typeface="Arial"/>
-                <a:cs typeface="Arial"/>
-              </a:rPr>
-              <a:t>2024: 3 bred abroad ⚠ · 2026: 2 in release process ⚠</a:t>
-            </a:r>
-          </a:p>
-          <a:p>
-            <a:pPr algn="l" marL="0" indent="0">
-              <a:spcBef>
-                <a:spcPts val="0"/>
-              </a:spcBef>
-              <a:spcAft>
-                <a:spcPts val="0"/>
-              </a:spcAft>
-              <a:buNone/>
-            </a:pPr>
-            <a:r>
-              <a:rPr lang="en-GB" sz="800" b="1" dirty="0">
-                <a:solidFill>
-                  <a:srgbClr val="262626"/>
-                </a:solidFill>
-                <a:latin typeface="Arial"/>
-                <a:cs typeface="Arial"/>
-              </a:rPr>
-              <a:t>USDA 2020–21 names only Parainema as still resistant</a:t>
-            </a:r>
-          </a:p>
-        </p:txBody>
-      </p:sp>
-      <p:sp>
-        <p:nvSpPr>
-          <p:cNvPr id="84" name="TextBox 84"/>
+              <a:rPr lang="en-GB" sz="700" dirty="0">
+                <a:solidFill>
+                  <a:srgbClr val="7F7F7F"/>
+                </a:solidFill>
+                <a:latin typeface="Arial"/>
+                <a:cs typeface="Arial"/>
+              </a:rPr>
+              <a:t>⚠ = pages not downloadable (IHCAFE bulletin, 2017 and 2020 articles)</a:t>
+            </a:r>
+          </a:p>
+        </p:txBody>
+      </p:sp>
+      <p:sp>
+        <p:nvSpPr>
+          <p:cNvPr id="79" name="TextBox 79"/>
           <p:cNvSpPr txBox="1"/>
           <p:nvPr/>
         </p:nvSpPr>
@@ -10668,7 +10441,7 @@
                 <a:latin typeface="Arial"/>
                 <a:cs typeface="Arial"/>
               </a:rPr>
-              <a:t>✔ USDA FAS Coffee Annual Honduras 2013–2025. ⚠ web extracts (pages blocked here): release years; Lempira weakening from 2015 (PROMECAFE 2019); IHCAFE 90 at 80 % (La Prensa 2017); IHCAFE SAT bulletin No 8, Oct 2017: Lempira = 56,08 % of monitored farms and 67,74 % of susceptible ones → susceptible 82,8 %, resistant 17,2 %; 2024 and 2026 releases.</a:t>
+              <a:t>✔ Morales &amp; Grajeda (IHCAFE), "Durabilidad de la resistencia genética a la roya … al 2019", PROMECAFE symposium 2019; World Coffee Research variety pages; El Heraldo 29 Feb 2024; La Prensa 29 Sep 2023; USDA Coffee Annual 2013–2021. The IHCAFE study also lists the Icatu 75 line as susceptible since 2016 and Obatá as 20 % susceptible.</a:t>
             </a:r>
           </a:p>
         </p:txBody>
@@ -12330,7 +12103,7 @@
                 <a:latin typeface="Arial"/>
                 <a:cs typeface="Arial"/>
               </a:rPr>
-              <a:t>2012–13 rust loans were due by 2019 (USDA), when prices were 2,9 $/kg. 2018 loan: L200/qq ≈ 8,4 $ (8 % of the 107 $ export price), repaid at 1,50 $/qq</a:t>
+              <a:t>2012–13 rust loans (10 %, 7 years) were due by 2019, when prices were 2,9 $/kg. 2018 loan: L200/qq ≈ 8,4 $ (8 % of the 107 $ export price), repaid at 1,50 $/qq</a:t>
             </a:r>
           </a:p>
           <a:p>
@@ -12572,7 +12345,7 @@
         </p:nvSpPr>
         <p:spPr>
           <a:xfrm>
-            <a:off x="3376422" y="4628239"/>
+            <a:off x="3376422" y="4616652"/>
             <a:ext cx="731520" cy="201168"/>
           </a:xfrm>
           <a:prstGeom prst="rect">
@@ -12606,7 +12379,7 @@
                 <a:latin typeface="Arial"/>
                 <a:cs typeface="Arial"/>
               </a:rPr>
-              <a:t>12,2</a:t>
+              <a:t>12,6</a:t>
             </a:r>
           </a:p>
         </p:txBody>
@@ -12930,7 +12703,7 @@
                 <a:latin typeface="Arial"/>
                 <a:cs typeface="Arial"/>
               </a:rPr>
-              <a:t>rust credit ⚠</a:t>
+              <a:t>rust credit*</a:t>
             </a:r>
           </a:p>
         </p:txBody>
@@ -13113,7 +12886,7 @@
                 <a:latin typeface="Arial"/>
                 <a:cs typeface="Arial"/>
               </a:rPr>
-              <a:t>2019</a:t>
+              <a:t>2018</a:t>
             </a:r>
           </a:p>
           <a:p>
@@ -13134,7 +12907,7 @@
                 <a:latin typeface="Arial"/>
                 <a:cs typeface="Arial"/>
               </a:rPr>
-              <a:t>debt fund ⚠</a:t>
+              <a:t>BANHPROVI fund</a:t>
             </a:r>
           </a:p>
         </p:txBody>
@@ -13407,7 +13180,7 @@
                 <a:latin typeface="Arial"/>
                 <a:cs typeface="Arial"/>
               </a:rPr>
-              <a:t>amount in a USDA report (read)</a:t>
+              <a:t>amount read (USDA report or article)</a:t>
             </a:r>
           </a:p>
         </p:txBody>
@@ -13420,7 +13193,7 @@
         </p:nvSpPr>
         <p:spPr>
           <a:xfrm>
-            <a:off x="2726741" y="6172200"/>
+            <a:off x="3025201" y="6172200"/>
             <a:ext cx="164592" cy="128016"/>
           </a:xfrm>
           <a:prstGeom prst="rect">
@@ -13442,7 +13215,7 @@
         </p:nvSpPr>
         <p:spPr>
           <a:xfrm>
-            <a:off x="3010205" y="6135624"/>
+            <a:off x="3308665" y="6135624"/>
             <a:ext cx="2926080" cy="201168"/>
           </a:xfrm>
           <a:prstGeom prst="rect">
@@ -14015,7 +13788,7 @@
                 <a:latin typeface="Arial"/>
                 <a:cs typeface="Arial"/>
               </a:rPr>
-              <a:t>⚠ Rust emergency credit (banks, BANHPROVI, BANADESA)</a:t>
+              <a:t>Rust credit made available (banks, BCH, BANHPROVI, BANADESA, IHCAFE)</a:t>
             </a:r>
           </a:p>
         </p:txBody>
@@ -14064,7 +13837,7 @@
                 <a:latin typeface="Arial"/>
                 <a:cs typeface="Arial"/>
               </a:rPr>
-              <a:t>growers hit by rust; BANADESA loans up to L25,000; to be repaid by 2019 (USDA)</a:t>
+              <a:t>L335 M actually used by April 2014; BANADESA loans up to L25,000, banks up to L150,000; 10 % interest, 7 years; to be repaid by 2019 (USDA)</a:t>
             </a:r>
           </a:p>
         </p:txBody>
@@ -14505,7 +14278,7 @@
                 <a:latin typeface="Arial"/>
                 <a:cs typeface="Arial"/>
               </a:rPr>
-              <a:t>all registered growers who ask</a:t>
+              <a:t>all growers who ask</a:t>
             </a:r>
           </a:p>
         </p:txBody>
@@ -14554,7 +14327,7 @@
                 <a:latin typeface="Arial"/>
                 <a:cs typeface="Arial"/>
               </a:rPr>
-              <a:t>2019</a:t>
+              <a:t>2018</a:t>
             </a:r>
           </a:p>
         </p:txBody>
@@ -14603,7 +14376,7 @@
                 <a:latin typeface="Arial"/>
                 <a:cs typeface="Arial"/>
               </a:rPr>
-              <a:t>⚠ Decreto 47-2018 debt readjustment + BANHPROVI coffee fund</a:t>
+              <a:t>Fondo para el Sector Cafetero (BANHPROVI)</a:t>
             </a:r>
           </a:p>
         </p:txBody>
@@ -14652,7 +14425,7 @@
                 <a:latin typeface="Arial"/>
                 <a:cs typeface="Arial"/>
               </a:rPr>
-              <a:t>&gt; 55,000 growers; up to 20 years at 2 %</a:t>
+              <a:t>backs refinancing and debt readjustment of growers; L300 M in three instalments</a:t>
             </a:r>
           </a:p>
         </p:txBody>
@@ -15287,7 +15060,7 @@
                 <a:latin typeface="Arial"/>
                 <a:cs typeface="Arial"/>
               </a:rPr>
-              <a:t>Sources: USDA FAS Coffee Annual Honduras 2011, 2015–2017, 2020, 2021, 2024 (amounts, terms, deductions); FAOSTAT exchange rates (L per US$: 2013 20,35, 2019 24,51, 2025 25,95). ⚠ = web-search extracts (El Heraldo, La Prensa, TNH, La Tribuna); the pages could not be opened. The 2018 decree text (L1 900 M, L200/qq) is also an extract; USDA wrote "about $25 per 100 pounds".</a:t>
+              <a:t>*2013: L1 715 M made available at 10 %, 7 years, but only L335 M (≈ 16 M$) used by April 2014 (El Heraldo, 7 Apr 2014, read). Sources: USDA FAS Coffee Annual Honduras 2011, 2015–2017, 2020, 2021, 2024 (amounts, terms, deductions); FAOSTAT exchange rates (L per US$: 2013 20,35, 2019 24,51, 2025 25,95). ⚠ = web-search extract, page not opened (2025 bono, 2021 debt). Decree 93-2018 terms read in El Heraldo, 29 Aug 2018: L200 per quintal oro (USDA wrote "about $25 per 100 pounds", which is wrong).</a:t>
             </a:r>
           </a:p>
         </p:txBody>

--- a/research/honduras/slides/Honduras_price_finance_varieties.pptx
+++ b/research/honduras/slides/Honduras_price_finance_varieties.pptx
@@ -9892,7 +9892,7 @@
                 <a:latin typeface="Arial"/>
                 <a:cs typeface="Arial"/>
               </a:rPr>
-              <a:t>Aug 2017</a:t>
+              <a:t>24 Aug 2017</a:t>
             </a:r>
           </a:p>
         </p:txBody>
@@ -9941,7 +9941,7 @@
                 <a:latin typeface="Arial"/>
                 <a:cs typeface="Arial"/>
               </a:rPr>
-              <a:t>60 % of the park; seed: 65 % Lempira</a:t>
+              <a:t>60 % of the park (IHCAFE adviser)</a:t>
             </a:r>
           </a:p>
         </p:txBody>
@@ -9990,7 +9990,7 @@
                 <a:latin typeface="Arial"/>
                 <a:cs typeface="Arial"/>
               </a:rPr>
-              <a:t>⚠ La Prensa, 25 Aug 2017</a:t>
+              <a:t>✔ La Prensa, 24 Aug 2017</a:t>
             </a:r>
           </a:p>
         </p:txBody>
@@ -10394,7 +10394,7 @@
                 <a:latin typeface="Arial"/>
                 <a:cs typeface="Arial"/>
               </a:rPr>
-              <a:t>⚠ = pages not downloadable (IHCAFE bulletin, 2017 and 2020 articles)</a:t>
+              <a:t>⚠ = page not downloadable (IHCAFE bulletin Oct 2017, 2020 article)</a:t>
             </a:r>
           </a:p>
         </p:txBody>
@@ -10441,7 +10441,7 @@
                 <a:latin typeface="Arial"/>
                 <a:cs typeface="Arial"/>
               </a:rPr>
-              <a:t>✔ Morales &amp; Grajeda (IHCAFE), "Durabilidad de la resistencia genética a la roya … al 2019", PROMECAFE symposium 2019; World Coffee Research variety pages; El Heraldo 29 Feb 2024; La Prensa 29 Sep 2023; USDA Coffee Annual 2013–2021. The IHCAFE study also lists the Icatu 75 line as susceptible since 2016 and Obatá as 20 % susceptible.</a:t>
+              <a:t>✔ Morales &amp; Grajeda (IHCAFE), "Durabilidad de la resistencia genética a la roya … al 2019", PROMECAFE symposium 2019; World Coffee Research variety pages; El Heraldo 29 Feb 2024; La Prensa 24 Aug 2017 and 29 Sep 2023; USDA Coffee Annual 2013–2021. The IHCAFE study also lists the Icatu 75 line as susceptible since 2016 and Obatá as 20 % susceptible.</a:t>
             </a:r>
           </a:p>
         </p:txBody>
